--- a/diagram/architecture-edge-cloud.pptx
+++ b/diagram/architecture-edge-cloud.pptx
@@ -7,6 +7,7 @@
   <p:sldIdLst>
     <p:sldId id="256" r:id="rId7"/>
     <p:sldId id="257" r:id="rId8"/>
+    <p:sldId id="258" r:id="rId9"/>
   </p:sldIdLst>
   <p:sldSz cx="12191695" cy="6858000" type="screen4x3"/>
   <p:notesSz cx="6858000" cy="9144000"/>
@@ -7664,7 +7665,7 @@
         </p:nvSpPr>
         <p:spPr>
           <a:xfrm>
-            <a:off x="457200" y="91440"/>
+            <a:off x="457200" y="182880"/>
             <a:ext cx="11247120" cy="411480"/>
           </a:xfrm>
           <a:prstGeom prst="rect">
@@ -7680,13 +7681,13 @@
           <a:p>
             <a:pPr algn="l"/>
             <a:r>
-              <a:rPr sz="2000" b="1" i="0">
+              <a:rPr sz="2200" b="1" i="0">
                 <a:solidFill>
                   <a:srgbClr val="FFFFFF"/>
                 </a:solidFill>
                 <a:latin typeface="Segoe UI"/>
               </a:rPr>
-              <a:t>Explication détaillée du Modèle Conceptuel de données</a:t>
+              <a:t>Modèle Conceptuel de Données (MCD)</a:t>
             </a:r>
           </a:p>
         </p:txBody>
@@ -7699,8 +7700,8 @@
         </p:nvSpPr>
         <p:spPr>
           <a:xfrm>
-            <a:off x="457200" y="484632"/>
-            <a:ext cx="11247120" cy="274320"/>
+            <a:off x="457200" y="603504"/>
+            <a:ext cx="11247120" cy="219456"/>
           </a:xfrm>
           <a:prstGeom prst="rect">
             <a:avLst/>
@@ -7715,55 +7716,20 @@
           <a:p>
             <a:pPr algn="l"/>
             <a:r>
-              <a:rPr sz="1500" b="1" i="0">
+              <a:rPr sz="950" b="0" i="1">
                 <a:solidFill>
                   <a:srgbClr val="F5C344"/>
                 </a:solidFill>
                 <a:latin typeface="Segoe UI"/>
               </a:rPr>
-              <a:t>en schéma étoile</a:t>
-            </a:r>
-          </a:p>
-        </p:txBody>
-      </p:sp>
-      <p:sp>
-        <p:nvSpPr>
-          <p:cNvPr id="5" name="TextBox 4"/>
-          <p:cNvSpPr txBox="1"/>
-          <p:nvPr/>
-        </p:nvSpPr>
-        <p:spPr>
-          <a:xfrm>
-            <a:off x="457200" y="749808"/>
-            <a:ext cx="11247120" cy="182880"/>
-          </a:xfrm>
-          <a:prstGeom prst="rect">
-            <a:avLst/>
-          </a:prstGeom>
-          <a:noFill/>
-        </p:spPr>
-        <p:txBody>
-          <a:bodyPr wrap="square" lIns="0" rIns="0" tIns="0" bIns="0">
-            <a:spAutoFit/>
-          </a:bodyPr>
-          <a:lstStyle/>
-          <a:p>
-            <a:pPr algn="l"/>
-            <a:r>
-              <a:rPr sz="950" b="0" i="1">
-                <a:solidFill>
-                  <a:srgbClr val="F5C344"/>
-                </a:solidFill>
-                <a:latin typeface="Segoe UI"/>
-              </a:rPr>
-              <a:t>Bloc 2 — AutoMeca Systems — niveau conceptuel (Merise), traduit ensuite en schéma en étoile physique</a:t>
-            </a:r>
-          </a:p>
-        </p:txBody>
-      </p:sp>
-      <p:sp>
-        <p:nvSpPr>
-          <p:cNvPr id="6" name="Rectangle 5"/>
+              <a:t>Bloc 2 — AutoMeca Systems — niveau conceptuel (Merise), indépendant de toute optimisation technique (voir page 3 pour le schéma en étoile physique)</a:t>
+            </a:r>
+          </a:p>
+        </p:txBody>
+      </p:sp>
+      <p:sp>
+        <p:nvSpPr>
+          <p:cNvPr id="5" name="Rectangle 4"/>
           <p:cNvSpPr/>
           <p:nvPr/>
         </p:nvSpPr>
@@ -7809,7 +7775,7 @@
       </p:sp>
       <p:sp>
         <p:nvSpPr>
-          <p:cNvPr id="7" name="Rectangle 6"/>
+          <p:cNvPr id="6" name="Rectangle 5"/>
           <p:cNvSpPr/>
           <p:nvPr/>
         </p:nvSpPr>
@@ -7853,7 +7819,7 @@
       </p:sp>
       <p:sp>
         <p:nvSpPr>
-          <p:cNvPr id="8" name="TextBox 7"/>
+          <p:cNvPr id="7" name="TextBox 6"/>
           <p:cNvSpPr txBox="1"/>
           <p:nvPr/>
         </p:nvSpPr>
@@ -7888,7 +7854,7 @@
       </p:sp>
       <p:sp>
         <p:nvSpPr>
-          <p:cNvPr id="9" name="TextBox 8"/>
+          <p:cNvPr id="8" name="TextBox 7"/>
           <p:cNvSpPr txBox="1"/>
           <p:nvPr/>
         </p:nvSpPr>
@@ -7922,7 +7888,7 @@
       </p:sp>
       <p:sp>
         <p:nvSpPr>
-          <p:cNvPr id="10" name="TextBox 9"/>
+          <p:cNvPr id="9" name="TextBox 8"/>
           <p:cNvSpPr txBox="1"/>
           <p:nvPr/>
         </p:nvSpPr>
@@ -7956,7 +7922,7 @@
       </p:sp>
       <p:sp>
         <p:nvSpPr>
-          <p:cNvPr id="11" name="TextBox 10"/>
+          <p:cNvPr id="10" name="TextBox 9"/>
           <p:cNvSpPr txBox="1"/>
           <p:nvPr/>
         </p:nvSpPr>
@@ -7990,7 +7956,7 @@
       </p:sp>
       <p:sp>
         <p:nvSpPr>
-          <p:cNvPr id="12" name="Rectangle 11"/>
+          <p:cNvPr id="11" name="Rectangle 10"/>
           <p:cNvSpPr/>
           <p:nvPr/>
         </p:nvSpPr>
@@ -8036,7 +8002,7 @@
       </p:sp>
       <p:sp>
         <p:nvSpPr>
-          <p:cNvPr id="13" name="Rectangle 12"/>
+          <p:cNvPr id="12" name="Rectangle 11"/>
           <p:cNvSpPr/>
           <p:nvPr/>
         </p:nvSpPr>
@@ -8080,7 +8046,7 @@
       </p:sp>
       <p:sp>
         <p:nvSpPr>
-          <p:cNvPr id="14" name="TextBox 13"/>
+          <p:cNvPr id="13" name="TextBox 12"/>
           <p:cNvSpPr txBox="1"/>
           <p:nvPr/>
         </p:nvSpPr>
@@ -8115,7 +8081,7 @@
       </p:sp>
       <p:sp>
         <p:nvSpPr>
-          <p:cNvPr id="15" name="TextBox 14"/>
+          <p:cNvPr id="14" name="TextBox 13"/>
           <p:cNvSpPr txBox="1"/>
           <p:nvPr/>
         </p:nvSpPr>
@@ -8149,7 +8115,7 @@
       </p:sp>
       <p:sp>
         <p:nvSpPr>
-          <p:cNvPr id="16" name="TextBox 15"/>
+          <p:cNvPr id="15" name="TextBox 14"/>
           <p:cNvSpPr txBox="1"/>
           <p:nvPr/>
         </p:nvSpPr>
@@ -8183,7 +8149,7 @@
       </p:sp>
       <p:sp>
         <p:nvSpPr>
-          <p:cNvPr id="17" name="TextBox 16"/>
+          <p:cNvPr id="16" name="TextBox 15"/>
           <p:cNvSpPr txBox="1"/>
           <p:nvPr/>
         </p:nvSpPr>
@@ -8217,7 +8183,7 @@
       </p:sp>
       <p:sp>
         <p:nvSpPr>
-          <p:cNvPr id="18" name="Rectangle 17"/>
+          <p:cNvPr id="17" name="Rectangle 16"/>
           <p:cNvSpPr/>
           <p:nvPr/>
         </p:nvSpPr>
@@ -8263,7 +8229,7 @@
       </p:sp>
       <p:sp>
         <p:nvSpPr>
-          <p:cNvPr id="19" name="Rectangle 18"/>
+          <p:cNvPr id="18" name="Rectangle 17"/>
           <p:cNvSpPr/>
           <p:nvPr/>
         </p:nvSpPr>
@@ -8307,7 +8273,7 @@
       </p:sp>
       <p:sp>
         <p:nvSpPr>
-          <p:cNvPr id="20" name="TextBox 19"/>
+          <p:cNvPr id="19" name="TextBox 18"/>
           <p:cNvSpPr txBox="1"/>
           <p:nvPr/>
         </p:nvSpPr>
@@ -8342,7 +8308,7 @@
       </p:sp>
       <p:sp>
         <p:nvSpPr>
-          <p:cNvPr id="21" name="TextBox 20"/>
+          <p:cNvPr id="20" name="TextBox 19"/>
           <p:cNvSpPr txBox="1"/>
           <p:nvPr/>
         </p:nvSpPr>
@@ -8376,7 +8342,7 @@
       </p:sp>
       <p:sp>
         <p:nvSpPr>
-          <p:cNvPr id="22" name="TextBox 21"/>
+          <p:cNvPr id="21" name="TextBox 20"/>
           <p:cNvSpPr txBox="1"/>
           <p:nvPr/>
         </p:nvSpPr>
@@ -8410,7 +8376,7 @@
       </p:sp>
       <p:sp>
         <p:nvSpPr>
-          <p:cNvPr id="23" name="Rectangle 22"/>
+          <p:cNvPr id="22" name="Rectangle 21"/>
           <p:cNvSpPr/>
           <p:nvPr/>
         </p:nvSpPr>
@@ -8456,7 +8422,7 @@
       </p:sp>
       <p:sp>
         <p:nvSpPr>
-          <p:cNvPr id="24" name="Rectangle 23"/>
+          <p:cNvPr id="23" name="Rectangle 22"/>
           <p:cNvSpPr/>
           <p:nvPr/>
         </p:nvSpPr>
@@ -8500,7 +8466,7 @@
       </p:sp>
       <p:sp>
         <p:nvSpPr>
-          <p:cNvPr id="25" name="TextBox 24"/>
+          <p:cNvPr id="24" name="TextBox 23"/>
           <p:cNvSpPr txBox="1"/>
           <p:nvPr/>
         </p:nvSpPr>
@@ -8535,7 +8501,7 @@
       </p:sp>
       <p:sp>
         <p:nvSpPr>
-          <p:cNvPr id="26" name="TextBox 25"/>
+          <p:cNvPr id="25" name="TextBox 24"/>
           <p:cNvSpPr txBox="1"/>
           <p:nvPr/>
         </p:nvSpPr>
@@ -8569,7 +8535,7 @@
       </p:sp>
       <p:sp>
         <p:nvSpPr>
-          <p:cNvPr id="27" name="TextBox 26"/>
+          <p:cNvPr id="26" name="TextBox 25"/>
           <p:cNvSpPr txBox="1"/>
           <p:nvPr/>
         </p:nvSpPr>
@@ -8603,7 +8569,7 @@
       </p:sp>
       <p:sp>
         <p:nvSpPr>
-          <p:cNvPr id="28" name="Rectangle 27"/>
+          <p:cNvPr id="27" name="Rectangle 26"/>
           <p:cNvSpPr/>
           <p:nvPr/>
         </p:nvSpPr>
@@ -8649,7 +8615,7 @@
       </p:sp>
       <p:sp>
         <p:nvSpPr>
-          <p:cNvPr id="29" name="Rectangle 28"/>
+          <p:cNvPr id="28" name="Rectangle 27"/>
           <p:cNvSpPr/>
           <p:nvPr/>
         </p:nvSpPr>
@@ -8693,7 +8659,7 @@
       </p:sp>
       <p:sp>
         <p:nvSpPr>
-          <p:cNvPr id="30" name="TextBox 29"/>
+          <p:cNvPr id="29" name="TextBox 28"/>
           <p:cNvSpPr txBox="1"/>
           <p:nvPr/>
         </p:nvSpPr>
@@ -8728,7 +8694,7 @@
       </p:sp>
       <p:sp>
         <p:nvSpPr>
-          <p:cNvPr id="31" name="TextBox 30"/>
+          <p:cNvPr id="30" name="TextBox 29"/>
           <p:cNvSpPr txBox="1"/>
           <p:nvPr/>
         </p:nvSpPr>
@@ -8762,7 +8728,7 @@
       </p:sp>
       <p:sp>
         <p:nvSpPr>
-          <p:cNvPr id="32" name="TextBox 31"/>
+          <p:cNvPr id="31" name="TextBox 30"/>
           <p:cNvSpPr txBox="1"/>
           <p:nvPr/>
         </p:nvSpPr>
@@ -8796,7 +8762,7 @@
       </p:sp>
       <p:sp>
         <p:nvSpPr>
-          <p:cNvPr id="33" name="TextBox 32"/>
+          <p:cNvPr id="32" name="TextBox 31"/>
           <p:cNvSpPr txBox="1"/>
           <p:nvPr/>
         </p:nvSpPr>
@@ -8830,7 +8796,7 @@
       </p:sp>
       <p:sp>
         <p:nvSpPr>
-          <p:cNvPr id="34" name="TextBox 33"/>
+          <p:cNvPr id="33" name="TextBox 32"/>
           <p:cNvSpPr txBox="1"/>
           <p:nvPr/>
         </p:nvSpPr>
@@ -8864,7 +8830,7 @@
       </p:sp>
       <p:sp>
         <p:nvSpPr>
-          <p:cNvPr id="35" name="TextBox 34"/>
+          <p:cNvPr id="34" name="TextBox 33"/>
           <p:cNvSpPr txBox="1"/>
           <p:nvPr/>
         </p:nvSpPr>
@@ -8898,7 +8864,7 @@
       </p:sp>
       <p:sp>
         <p:nvSpPr>
-          <p:cNvPr id="36" name="TextBox 35"/>
+          <p:cNvPr id="35" name="TextBox 34"/>
           <p:cNvSpPr txBox="1"/>
           <p:nvPr/>
         </p:nvSpPr>
@@ -8932,7 +8898,7 @@
       </p:sp>
       <p:sp>
         <p:nvSpPr>
-          <p:cNvPr id="37" name="Rectangle 36"/>
+          <p:cNvPr id="36" name="Rectangle 35"/>
           <p:cNvSpPr/>
           <p:nvPr/>
         </p:nvSpPr>
@@ -8978,7 +8944,7 @@
       </p:sp>
       <p:sp>
         <p:nvSpPr>
-          <p:cNvPr id="38" name="Rectangle 37"/>
+          <p:cNvPr id="37" name="Rectangle 36"/>
           <p:cNvSpPr/>
           <p:nvPr/>
         </p:nvSpPr>
@@ -9022,7 +8988,7 @@
       </p:sp>
       <p:sp>
         <p:nvSpPr>
-          <p:cNvPr id="39" name="TextBox 38"/>
+          <p:cNvPr id="38" name="TextBox 37"/>
           <p:cNvSpPr txBox="1"/>
           <p:nvPr/>
         </p:nvSpPr>
@@ -9057,7 +9023,7 @@
       </p:sp>
       <p:sp>
         <p:nvSpPr>
-          <p:cNvPr id="40" name="TextBox 39"/>
+          <p:cNvPr id="39" name="TextBox 38"/>
           <p:cNvSpPr txBox="1"/>
           <p:nvPr/>
         </p:nvSpPr>
@@ -9091,7 +9057,7 @@
       </p:sp>
       <p:sp>
         <p:nvSpPr>
-          <p:cNvPr id="41" name="TextBox 40"/>
+          <p:cNvPr id="40" name="TextBox 39"/>
           <p:cNvSpPr txBox="1"/>
           <p:nvPr/>
         </p:nvSpPr>
@@ -9125,7 +9091,7 @@
       </p:sp>
       <p:sp>
         <p:nvSpPr>
-          <p:cNvPr id="42" name="Rectangle 41"/>
+          <p:cNvPr id="41" name="Rectangle 40"/>
           <p:cNvSpPr/>
           <p:nvPr/>
         </p:nvSpPr>
@@ -9171,7 +9137,7 @@
       </p:sp>
       <p:sp>
         <p:nvSpPr>
-          <p:cNvPr id="43" name="Rectangle 42"/>
+          <p:cNvPr id="42" name="Rectangle 41"/>
           <p:cNvSpPr/>
           <p:nvPr/>
         </p:nvSpPr>
@@ -9215,7 +9181,7 @@
       </p:sp>
       <p:sp>
         <p:nvSpPr>
-          <p:cNvPr id="44" name="TextBox 43"/>
+          <p:cNvPr id="43" name="TextBox 42"/>
           <p:cNvSpPr txBox="1"/>
           <p:nvPr/>
         </p:nvSpPr>
@@ -9250,7 +9216,7 @@
       </p:sp>
       <p:sp>
         <p:nvSpPr>
-          <p:cNvPr id="45" name="TextBox 44"/>
+          <p:cNvPr id="44" name="TextBox 43"/>
           <p:cNvSpPr txBox="1"/>
           <p:nvPr/>
         </p:nvSpPr>
@@ -9284,7 +9250,7 @@
       </p:sp>
       <p:sp>
         <p:nvSpPr>
-          <p:cNvPr id="46" name="TextBox 45"/>
+          <p:cNvPr id="45" name="TextBox 44"/>
           <p:cNvSpPr txBox="1"/>
           <p:nvPr/>
         </p:nvSpPr>
@@ -9318,7 +9284,7 @@
       </p:sp>
       <p:sp>
         <p:nvSpPr>
-          <p:cNvPr id="47" name="TextBox 46"/>
+          <p:cNvPr id="46" name="TextBox 45"/>
           <p:cNvSpPr txBox="1"/>
           <p:nvPr/>
         </p:nvSpPr>
@@ -9352,7 +9318,7 @@
       </p:sp>
       <p:sp>
         <p:nvSpPr>
-          <p:cNvPr id="48" name="TextBox 47"/>
+          <p:cNvPr id="47" name="TextBox 46"/>
           <p:cNvSpPr txBox="1"/>
           <p:nvPr/>
         </p:nvSpPr>
@@ -9387,7 +9353,7 @@
       </p:sp>
       <p:cxnSp>
         <p:nvCxnSpPr>
-          <p:cNvPr id="49" name="Connector 48"/>
+          <p:cNvPr id="48" name="Connector 47"/>
           <p:cNvCxnSpPr/>
           <p:nvPr/>
         </p:nvCxnSpPr>
@@ -9422,7 +9388,7 @@
       </p:cxnSp>
       <p:sp>
         <p:nvSpPr>
-          <p:cNvPr id="50" name="TextBox 49"/>
+          <p:cNvPr id="49" name="TextBox 48"/>
           <p:cNvSpPr txBox="1"/>
           <p:nvPr/>
         </p:nvSpPr>
@@ -9457,7 +9423,7 @@
       </p:sp>
       <p:sp>
         <p:nvSpPr>
-          <p:cNvPr id="51" name="TextBox 50"/>
+          <p:cNvPr id="50" name="TextBox 49"/>
           <p:cNvSpPr txBox="1"/>
           <p:nvPr/>
         </p:nvSpPr>
@@ -9492,7 +9458,7 @@
       </p:sp>
       <p:sp>
         <p:nvSpPr>
-          <p:cNvPr id="52" name="Rounded Rectangle 51"/>
+          <p:cNvPr id="51" name="Rounded Rectangle 50"/>
           <p:cNvSpPr/>
           <p:nvPr/>
         </p:nvSpPr>
@@ -9547,7 +9513,7 @@
       </p:sp>
       <p:cxnSp>
         <p:nvCxnSpPr>
-          <p:cNvPr id="53" name="Connector 52"/>
+          <p:cNvPr id="52" name="Connector 51"/>
           <p:cNvCxnSpPr/>
           <p:nvPr/>
         </p:nvCxnSpPr>
@@ -9582,7 +9548,7 @@
       </p:cxnSp>
       <p:sp>
         <p:nvSpPr>
-          <p:cNvPr id="54" name="TextBox 53"/>
+          <p:cNvPr id="53" name="TextBox 52"/>
           <p:cNvSpPr txBox="1"/>
           <p:nvPr/>
         </p:nvSpPr>
@@ -9617,7 +9583,7 @@
       </p:sp>
       <p:sp>
         <p:nvSpPr>
-          <p:cNvPr id="55" name="TextBox 54"/>
+          <p:cNvPr id="54" name="TextBox 53"/>
           <p:cNvSpPr txBox="1"/>
           <p:nvPr/>
         </p:nvSpPr>
@@ -9652,7 +9618,7 @@
       </p:sp>
       <p:sp>
         <p:nvSpPr>
-          <p:cNvPr id="56" name="Rounded Rectangle 55"/>
+          <p:cNvPr id="55" name="Rounded Rectangle 54"/>
           <p:cNvSpPr/>
           <p:nvPr/>
         </p:nvSpPr>
@@ -9707,7 +9673,7 @@
       </p:sp>
       <p:cxnSp>
         <p:nvCxnSpPr>
-          <p:cNvPr id="57" name="Connector 56"/>
+          <p:cNvPr id="56" name="Connector 55"/>
           <p:cNvCxnSpPr/>
           <p:nvPr/>
         </p:nvCxnSpPr>
@@ -9742,7 +9708,7 @@
       </p:cxnSp>
       <p:sp>
         <p:nvSpPr>
-          <p:cNvPr id="58" name="TextBox 57"/>
+          <p:cNvPr id="57" name="TextBox 56"/>
           <p:cNvSpPr txBox="1"/>
           <p:nvPr/>
         </p:nvSpPr>
@@ -9777,7 +9743,7 @@
       </p:sp>
       <p:sp>
         <p:nvSpPr>
-          <p:cNvPr id="59" name="TextBox 58"/>
+          <p:cNvPr id="58" name="TextBox 57"/>
           <p:cNvSpPr txBox="1"/>
           <p:nvPr/>
         </p:nvSpPr>
@@ -9812,7 +9778,7 @@
       </p:sp>
       <p:sp>
         <p:nvSpPr>
-          <p:cNvPr id="60" name="Rounded Rectangle 59"/>
+          <p:cNvPr id="59" name="Rounded Rectangle 58"/>
           <p:cNvSpPr/>
           <p:nvPr/>
         </p:nvSpPr>
@@ -9867,7 +9833,7 @@
       </p:sp>
       <p:cxnSp>
         <p:nvCxnSpPr>
-          <p:cNvPr id="61" name="Connector 60"/>
+          <p:cNvPr id="60" name="Connector 59"/>
           <p:cNvCxnSpPr/>
           <p:nvPr/>
         </p:nvCxnSpPr>
@@ -9902,7 +9868,7 @@
       </p:cxnSp>
       <p:sp>
         <p:nvSpPr>
-          <p:cNvPr id="62" name="TextBox 61"/>
+          <p:cNvPr id="61" name="TextBox 60"/>
           <p:cNvSpPr txBox="1"/>
           <p:nvPr/>
         </p:nvSpPr>
@@ -9937,7 +9903,7 @@
       </p:sp>
       <p:sp>
         <p:nvSpPr>
-          <p:cNvPr id="63" name="TextBox 62"/>
+          <p:cNvPr id="62" name="TextBox 61"/>
           <p:cNvSpPr txBox="1"/>
           <p:nvPr/>
         </p:nvSpPr>
@@ -9972,7 +9938,7 @@
       </p:sp>
       <p:sp>
         <p:nvSpPr>
-          <p:cNvPr id="64" name="Rounded Rectangle 63"/>
+          <p:cNvPr id="63" name="Rounded Rectangle 62"/>
           <p:cNvSpPr/>
           <p:nvPr/>
         </p:nvSpPr>
@@ -10027,7 +9993,7 @@
       </p:sp>
       <p:cxnSp>
         <p:nvCxnSpPr>
-          <p:cNvPr id="65" name="Connector 64"/>
+          <p:cNvPr id="64" name="Connector 63"/>
           <p:cNvCxnSpPr/>
           <p:nvPr/>
         </p:nvCxnSpPr>
@@ -10062,7 +10028,7 @@
       </p:cxnSp>
       <p:sp>
         <p:nvSpPr>
-          <p:cNvPr id="66" name="TextBox 65"/>
+          <p:cNvPr id="65" name="TextBox 64"/>
           <p:cNvSpPr txBox="1"/>
           <p:nvPr/>
         </p:nvSpPr>
@@ -10097,7 +10063,7 @@
       </p:sp>
       <p:sp>
         <p:nvSpPr>
-          <p:cNvPr id="67" name="TextBox 66"/>
+          <p:cNvPr id="66" name="TextBox 65"/>
           <p:cNvSpPr txBox="1"/>
           <p:nvPr/>
         </p:nvSpPr>
@@ -10132,7 +10098,7 @@
       </p:sp>
       <p:sp>
         <p:nvSpPr>
-          <p:cNvPr id="68" name="Rounded Rectangle 67"/>
+          <p:cNvPr id="67" name="Rounded Rectangle 66"/>
           <p:cNvSpPr/>
           <p:nvPr/>
         </p:nvSpPr>
@@ -10187,7 +10153,7 @@
       </p:sp>
       <p:cxnSp>
         <p:nvCxnSpPr>
-          <p:cNvPr id="69" name="Connector 68"/>
+          <p:cNvPr id="68" name="Connector 67"/>
           <p:cNvCxnSpPr/>
           <p:nvPr/>
         </p:nvCxnSpPr>
@@ -10222,7 +10188,7 @@
       </p:cxnSp>
       <p:sp>
         <p:nvSpPr>
-          <p:cNvPr id="70" name="TextBox 69"/>
+          <p:cNvPr id="69" name="TextBox 68"/>
           <p:cNvSpPr txBox="1"/>
           <p:nvPr/>
         </p:nvSpPr>
@@ -10257,7 +10223,7 @@
       </p:sp>
       <p:sp>
         <p:nvSpPr>
-          <p:cNvPr id="71" name="TextBox 70"/>
+          <p:cNvPr id="70" name="TextBox 69"/>
           <p:cNvSpPr txBox="1"/>
           <p:nvPr/>
         </p:nvSpPr>
@@ -10292,7 +10258,7 @@
       </p:sp>
       <p:sp>
         <p:nvSpPr>
-          <p:cNvPr id="72" name="Rounded Rectangle 71"/>
+          <p:cNvPr id="71" name="Rounded Rectangle 70"/>
           <p:cNvSpPr/>
           <p:nvPr/>
         </p:nvSpPr>
@@ -10347,7 +10313,7 @@
       </p:sp>
       <p:cxnSp>
         <p:nvCxnSpPr>
-          <p:cNvPr id="73" name="Connector 72"/>
+          <p:cNvPr id="72" name="Connector 71"/>
           <p:cNvCxnSpPr/>
           <p:nvPr/>
         </p:nvCxnSpPr>
@@ -10382,7 +10348,7 @@
       </p:cxnSp>
       <p:sp>
         <p:nvSpPr>
-          <p:cNvPr id="74" name="TextBox 73"/>
+          <p:cNvPr id="73" name="TextBox 72"/>
           <p:cNvSpPr txBox="1"/>
           <p:nvPr/>
         </p:nvSpPr>
@@ -10417,7 +10383,7 @@
       </p:sp>
       <p:sp>
         <p:nvSpPr>
-          <p:cNvPr id="75" name="TextBox 74"/>
+          <p:cNvPr id="74" name="TextBox 73"/>
           <p:cNvSpPr txBox="1"/>
           <p:nvPr/>
         </p:nvSpPr>
@@ -10452,7 +10418,7 @@
       </p:sp>
       <p:sp>
         <p:nvSpPr>
-          <p:cNvPr id="76" name="Rounded Rectangle 75"/>
+          <p:cNvPr id="75" name="Rounded Rectangle 74"/>
           <p:cNvSpPr/>
           <p:nvPr/>
         </p:nvSpPr>
@@ -10507,7 +10473,7 @@
       </p:sp>
       <p:cxnSp>
         <p:nvCxnSpPr>
-          <p:cNvPr id="77" name="Connector 76"/>
+          <p:cNvPr id="76" name="Connector 75"/>
           <p:cNvCxnSpPr/>
           <p:nvPr/>
         </p:nvCxnSpPr>
@@ -10542,7 +10508,7 @@
       </p:cxnSp>
       <p:sp>
         <p:nvSpPr>
-          <p:cNvPr id="78" name="TextBox 77"/>
+          <p:cNvPr id="77" name="TextBox 76"/>
           <p:cNvSpPr txBox="1"/>
           <p:nvPr/>
         </p:nvSpPr>
@@ -10577,7 +10543,7 @@
       </p:sp>
       <p:sp>
         <p:nvSpPr>
-          <p:cNvPr id="79" name="TextBox 78"/>
+          <p:cNvPr id="78" name="TextBox 77"/>
           <p:cNvSpPr txBox="1"/>
           <p:nvPr/>
         </p:nvSpPr>
@@ -10612,7 +10578,7 @@
       </p:sp>
       <p:sp>
         <p:nvSpPr>
-          <p:cNvPr id="80" name="Rounded Rectangle 79"/>
+          <p:cNvPr id="79" name="Rounded Rectangle 78"/>
           <p:cNvSpPr/>
           <p:nvPr/>
         </p:nvSpPr>
@@ -10667,7 +10633,7 @@
       </p:sp>
       <p:sp>
         <p:nvSpPr>
-          <p:cNvPr id="81" name="Rounded Rectangle 80"/>
+          <p:cNvPr id="80" name="Rounded Rectangle 79"/>
           <p:cNvSpPr/>
           <p:nvPr/>
         </p:nvSpPr>
@@ -10713,7 +10679,7 @@
       </p:sp>
       <p:sp>
         <p:nvSpPr>
-          <p:cNvPr id="82" name="TextBox 81"/>
+          <p:cNvPr id="81" name="TextBox 80"/>
           <p:cNvSpPr txBox="1"/>
           <p:nvPr/>
         </p:nvSpPr>
@@ -10741,14 +10707,14 @@
                 </a:solidFill>
                 <a:latin typeface="Segoe UI"/>
               </a:rPr>
-              <a:t>Notation Merise : (min,max) — 0,n = zéro à plusieurs · 1,1 = un et un seul  |  Ce MCD reste stable même si le modèle physique (page 1) regroupe erreurs/pannes/maintenances dans une table de faits unifiée pour la performance analytique</a:t>
-            </a:r>
-          </a:p>
-        </p:txBody>
-      </p:sp>
-      <p:sp>
-        <p:nvSpPr>
-          <p:cNvPr id="83" name="TextBox 82"/>
+              <a:t>Notation Merise : (min,max) — 0,n = zéro à plusieurs · 1,1 = un et un seul  |  Ce MCD reste stable même si le modèle physique (page 3) regroupe erreurs/pannes/maintenances dans une table de faits unifiée pour la performance analytique</a:t>
+            </a:r>
+          </a:p>
+        </p:txBody>
+      </p:sp>
+      <p:sp>
+        <p:nvSpPr>
+          <p:cNvPr id="82" name="TextBox 81"/>
           <p:cNvSpPr txBox="1"/>
           <p:nvPr/>
         </p:nvSpPr>
@@ -10783,7 +10749,2225 @@
       </p:sp>
       <p:sp>
         <p:nvSpPr>
-          <p:cNvPr id="84" name="Rounded Rectangle 83"/>
+          <p:cNvPr id="83" name="Rounded Rectangle 82"/>
+          <p:cNvSpPr/>
+          <p:nvPr/>
+        </p:nvSpPr>
+        <p:spPr>
+          <a:xfrm>
+            <a:off x="10104120" y="6419088"/>
+            <a:ext cx="1737360" cy="310896"/>
+          </a:xfrm>
+          <a:prstGeom prst="roundRect">
+            <a:avLst>
+              <a:gd name="adj" fmla="val 50000"/>
+            </a:avLst>
+          </a:prstGeom>
+          <a:solidFill>
+            <a:srgbClr val="E9F3FB"/>
+          </a:solidFill>
+          <a:ln>
+            <a:noFill/>
+          </a:ln>
+          <a:effectLst/>
+        </p:spPr>
+        <p:style>
+          <a:lnRef idx="1">
+            <a:schemeClr val="accent1"/>
+          </a:lnRef>
+          <a:fillRef idx="3">
+            <a:schemeClr val="accent1"/>
+          </a:fillRef>
+          <a:effectRef idx="2">
+            <a:schemeClr val="accent1"/>
+          </a:effectRef>
+          <a:fontRef idx="minor">
+            <a:schemeClr val="lt1"/>
+          </a:fontRef>
+        </p:style>
+        <p:txBody>
+          <a:bodyPr rtlCol="0" anchor="ctr" lIns="50800" rIns="50800" tIns="0" bIns="0" wrap="square"/>
+          <a:lstStyle/>
+          <a:p>
+            <a:pPr algn="ctr"/>
+            <a:r>
+              <a:rPr sz="950" b="1" i="0">
+                <a:solidFill>
+                  <a:srgbClr val="0B2947"/>
+                </a:solidFill>
+                <a:latin typeface="Segoe UI"/>
+              </a:rPr>
+              <a:t>AutoMeca Systems</a:t>
+            </a:r>
+          </a:p>
+        </p:txBody>
+      </p:sp>
+    </p:spTree>
+  </p:cSld>
+  <p:clrMapOvr>
+    <a:masterClrMapping/>
+  </p:clrMapOvr>
+</p:sld>
+</file>
+
+<file path=ppt/slides/slide3.xml><?xml version="1.0" encoding="utf-8"?>
+<p:sld xmlns:a="http://schemas.openxmlformats.org/drawingml/2006/main" xmlns:p="http://schemas.openxmlformats.org/presentationml/2006/main" xmlns:r="http://schemas.openxmlformats.org/officeDocument/2006/relationships">
+  <p:cSld>
+    <p:bg>
+      <p:bgPr>
+        <a:solidFill>
+          <a:srgbClr val="FFFFFF"/>
+        </a:solidFill>
+        <a:effectLst/>
+      </p:bgPr>
+    </p:bg>
+    <p:spTree>
+      <p:nvGrpSpPr>
+        <p:cNvPr id="1" name=""/>
+        <p:cNvGrpSpPr/>
+        <p:nvPr/>
+      </p:nvGrpSpPr>
+      <p:grpSpPr/>
+      <p:sp>
+        <p:nvSpPr>
+          <p:cNvPr id="2" name="Rectangle 1"/>
+          <p:cNvSpPr/>
+          <p:nvPr/>
+        </p:nvSpPr>
+        <p:spPr>
+          <a:xfrm>
+            <a:off x="0" y="0"/>
+            <a:ext cx="12191695" cy="932688"/>
+          </a:xfrm>
+          <a:prstGeom prst="rect">
+            <a:avLst/>
+          </a:prstGeom>
+          <a:solidFill>
+            <a:srgbClr val="0B2947"/>
+          </a:solidFill>
+          <a:ln>
+            <a:noFill/>
+          </a:ln>
+          <a:effectLst/>
+        </p:spPr>
+        <p:style>
+          <a:lnRef idx="1">
+            <a:schemeClr val="accent1"/>
+          </a:lnRef>
+          <a:fillRef idx="3">
+            <a:schemeClr val="accent1"/>
+          </a:fillRef>
+          <a:effectRef idx="2">
+            <a:schemeClr val="accent1"/>
+          </a:effectRef>
+          <a:fontRef idx="minor">
+            <a:schemeClr val="lt1"/>
+          </a:fontRef>
+        </p:style>
+        <p:txBody>
+          <a:bodyPr rtlCol="0" anchor="ctr"/>
+          <a:lstStyle/>
+          <a:p>
+            <a:pPr algn="ctr"/>
+          </a:p>
+        </p:txBody>
+      </p:sp>
+      <p:sp>
+        <p:nvSpPr>
+          <p:cNvPr id="3" name="TextBox 2"/>
+          <p:cNvSpPr txBox="1"/>
+          <p:nvPr/>
+        </p:nvSpPr>
+        <p:spPr>
+          <a:xfrm>
+            <a:off x="457200" y="109728"/>
+            <a:ext cx="11247120" cy="411480"/>
+          </a:xfrm>
+          <a:prstGeom prst="rect">
+            <a:avLst/>
+          </a:prstGeom>
+          <a:noFill/>
+        </p:spPr>
+        <p:txBody>
+          <a:bodyPr wrap="square" lIns="0" rIns="0" tIns="0" bIns="0">
+            <a:spAutoFit/>
+          </a:bodyPr>
+          <a:lstStyle/>
+          <a:p>
+            <a:pPr algn="l"/>
+            <a:r>
+              <a:rPr sz="2100" b="1" i="0">
+                <a:solidFill>
+                  <a:srgbClr val="FFFFFF"/>
+                </a:solidFill>
+                <a:latin typeface="Segoe UI"/>
+              </a:rPr>
+              <a:t>Schéma en étoile — modèle physique (PostgreSQL)</a:t>
+            </a:r>
+          </a:p>
+        </p:txBody>
+      </p:sp>
+      <p:sp>
+        <p:nvSpPr>
+          <p:cNvPr id="4" name="TextBox 3"/>
+          <p:cNvSpPr txBox="1"/>
+          <p:nvPr/>
+        </p:nvSpPr>
+        <p:spPr>
+          <a:xfrm>
+            <a:off x="457200" y="530352"/>
+            <a:ext cx="11247120" cy="320040"/>
+          </a:xfrm>
+          <a:prstGeom prst="rect">
+            <a:avLst/>
+          </a:prstGeom>
+          <a:noFill/>
+        </p:spPr>
+        <p:txBody>
+          <a:bodyPr wrap="square" lIns="0" rIns="0" tIns="0" bIns="0">
+            <a:spAutoFit/>
+          </a:bodyPr>
+          <a:lstStyle/>
+          <a:p>
+            <a:pPr algn="l"/>
+            <a:r>
+              <a:rPr sz="1150" b="0" i="1">
+                <a:solidFill>
+                  <a:srgbClr val="F5C344"/>
+                </a:solidFill>
+                <a:latin typeface="Segoe UI"/>
+              </a:rPr>
+              <a:t>Bloc 2 — AutoMeca Systems — table de faits unifiée entourée de ses dimensions (schéma `datamart`)</a:t>
+            </a:r>
+          </a:p>
+        </p:txBody>
+      </p:sp>
+      <p:sp>
+        <p:nvSpPr>
+          <p:cNvPr id="5" name="Rectangle 4"/>
+          <p:cNvSpPr/>
+          <p:nvPr/>
+        </p:nvSpPr>
+        <p:spPr>
+          <a:xfrm>
+            <a:off x="4846320" y="2706624"/>
+            <a:ext cx="2468880" cy="1993392"/>
+          </a:xfrm>
+          <a:prstGeom prst="rect">
+            <a:avLst/>
+          </a:prstGeom>
+          <a:solidFill>
+            <a:srgbClr val="FFFFFF"/>
+          </a:solidFill>
+          <a:ln w="16510">
+            <a:solidFill>
+              <a:srgbClr val="0B2947"/>
+            </a:solidFill>
+          </a:ln>
+          <a:effectLst/>
+        </p:spPr>
+        <p:style>
+          <a:lnRef idx="1">
+            <a:schemeClr val="accent1"/>
+          </a:lnRef>
+          <a:fillRef idx="3">
+            <a:schemeClr val="accent1"/>
+          </a:fillRef>
+          <a:effectRef idx="2">
+            <a:schemeClr val="accent1"/>
+          </a:effectRef>
+          <a:fontRef idx="minor">
+            <a:schemeClr val="lt1"/>
+          </a:fontRef>
+        </p:style>
+        <p:txBody>
+          <a:bodyPr rtlCol="0" anchor="ctr"/>
+          <a:lstStyle/>
+          <a:p>
+            <a:pPr algn="ctr"/>
+          </a:p>
+        </p:txBody>
+      </p:sp>
+      <p:sp>
+        <p:nvSpPr>
+          <p:cNvPr id="6" name="Rectangle 5"/>
+          <p:cNvSpPr/>
+          <p:nvPr/>
+        </p:nvSpPr>
+        <p:spPr>
+          <a:xfrm>
+            <a:off x="4846320" y="2706624"/>
+            <a:ext cx="2468880" cy="292608"/>
+          </a:xfrm>
+          <a:prstGeom prst="rect">
+            <a:avLst/>
+          </a:prstGeom>
+          <a:solidFill>
+            <a:srgbClr val="0A66C2"/>
+          </a:solidFill>
+          <a:ln>
+            <a:noFill/>
+          </a:ln>
+          <a:effectLst/>
+        </p:spPr>
+        <p:style>
+          <a:lnRef idx="1">
+            <a:schemeClr val="accent1"/>
+          </a:lnRef>
+          <a:fillRef idx="3">
+            <a:schemeClr val="accent1"/>
+          </a:fillRef>
+          <a:effectRef idx="2">
+            <a:schemeClr val="accent1"/>
+          </a:effectRef>
+          <a:fontRef idx="minor">
+            <a:schemeClr val="lt1"/>
+          </a:fontRef>
+        </p:style>
+        <p:txBody>
+          <a:bodyPr rtlCol="0" anchor="ctr"/>
+          <a:lstStyle/>
+          <a:p>
+            <a:pPr algn="ctr"/>
+          </a:p>
+        </p:txBody>
+      </p:sp>
+      <p:sp>
+        <p:nvSpPr>
+          <p:cNvPr id="7" name="TextBox 6"/>
+          <p:cNvSpPr txBox="1"/>
+          <p:nvPr/>
+        </p:nvSpPr>
+        <p:spPr>
+          <a:xfrm>
+            <a:off x="4937760" y="2706624"/>
+            <a:ext cx="2286000" cy="292608"/>
+          </a:xfrm>
+          <a:prstGeom prst="rect">
+            <a:avLst/>
+          </a:prstGeom>
+          <a:noFill/>
+        </p:spPr>
+        <p:txBody>
+          <a:bodyPr wrap="square" lIns="0" rIns="0" tIns="0" bIns="0" anchor="ctr">
+            <a:spAutoFit/>
+          </a:bodyPr>
+          <a:lstStyle/>
+          <a:p>
+            <a:pPr algn="l"/>
+            <a:r>
+              <a:rPr sz="1150" b="1" i="0">
+                <a:solidFill>
+                  <a:srgbClr val="FFFFFF"/>
+                </a:solidFill>
+                <a:latin typeface="Segoe UI"/>
+              </a:rPr>
+              <a:t>FAIT_EVENEMENT</a:t>
+            </a:r>
+          </a:p>
+        </p:txBody>
+      </p:sp>
+      <p:sp>
+        <p:nvSpPr>
+          <p:cNvPr id="8" name="TextBox 7"/>
+          <p:cNvSpPr txBox="1"/>
+          <p:nvPr/>
+        </p:nvSpPr>
+        <p:spPr>
+          <a:xfrm>
+            <a:off x="4974336" y="3044951"/>
+            <a:ext cx="2212848" cy="201168"/>
+          </a:xfrm>
+          <a:prstGeom prst="rect">
+            <a:avLst/>
+          </a:prstGeom>
+          <a:noFill/>
+        </p:spPr>
+        <p:txBody>
+          <a:bodyPr wrap="square" lIns="0" rIns="0" tIns="0" bIns="0">
+            <a:spAutoFit/>
+          </a:bodyPr>
+          <a:lstStyle/>
+          <a:p>
+            <a:r>
+              <a:rPr sz="900" b="0" i="0" u="sng">
+                <a:solidFill>
+                  <a:srgbClr val="22303F"/>
+                </a:solidFill>
+                <a:latin typeface="Segoe UI"/>
+              </a:rPr>
+              <a:t>id_evenement (id)</a:t>
+            </a:r>
+          </a:p>
+        </p:txBody>
+      </p:sp>
+      <p:sp>
+        <p:nvSpPr>
+          <p:cNvPr id="9" name="TextBox 8"/>
+          <p:cNvSpPr txBox="1"/>
+          <p:nvPr/>
+        </p:nvSpPr>
+        <p:spPr>
+          <a:xfrm>
+            <a:off x="4974336" y="3246120"/>
+            <a:ext cx="2212848" cy="201168"/>
+          </a:xfrm>
+          <a:prstGeom prst="rect">
+            <a:avLst/>
+          </a:prstGeom>
+          <a:noFill/>
+        </p:spPr>
+        <p:txBody>
+          <a:bodyPr wrap="square" lIns="0" rIns="0" tIns="0" bIns="0">
+            <a:spAutoFit/>
+          </a:bodyPr>
+          <a:lstStyle/>
+          <a:p>
+            <a:r>
+              <a:rPr sz="900" b="0" i="0">
+                <a:solidFill>
+                  <a:srgbClr val="22303F"/>
+                </a:solidFill>
+                <a:latin typeface="Segoe UI"/>
+              </a:rPr>
+              <a:t>id_date</a:t>
+            </a:r>
+          </a:p>
+        </p:txBody>
+      </p:sp>
+      <p:sp>
+        <p:nvSpPr>
+          <p:cNvPr id="10" name="TextBox 9"/>
+          <p:cNvSpPr txBox="1"/>
+          <p:nvPr/>
+        </p:nvSpPr>
+        <p:spPr>
+          <a:xfrm>
+            <a:off x="4974336" y="3447287"/>
+            <a:ext cx="2212848" cy="201168"/>
+          </a:xfrm>
+          <a:prstGeom prst="rect">
+            <a:avLst/>
+          </a:prstGeom>
+          <a:noFill/>
+        </p:spPr>
+        <p:txBody>
+          <a:bodyPr wrap="square" lIns="0" rIns="0" tIns="0" bIns="0">
+            <a:spAutoFit/>
+          </a:bodyPr>
+          <a:lstStyle/>
+          <a:p>
+            <a:r>
+              <a:rPr sz="900" b="0" i="0">
+                <a:solidFill>
+                  <a:srgbClr val="22303F"/>
+                </a:solidFill>
+                <a:latin typeface="Segoe UI"/>
+              </a:rPr>
+              <a:t>datetime_evt</a:t>
+            </a:r>
+          </a:p>
+        </p:txBody>
+      </p:sp>
+      <p:sp>
+        <p:nvSpPr>
+          <p:cNvPr id="11" name="TextBox 10"/>
+          <p:cNvSpPr txBox="1"/>
+          <p:nvPr/>
+        </p:nvSpPr>
+        <p:spPr>
+          <a:xfrm>
+            <a:off x="4974336" y="3648456"/>
+            <a:ext cx="2212848" cy="201168"/>
+          </a:xfrm>
+          <a:prstGeom prst="rect">
+            <a:avLst/>
+          </a:prstGeom>
+          <a:noFill/>
+        </p:spPr>
+        <p:txBody>
+          <a:bodyPr wrap="square" lIns="0" rIns="0" tIns="0" bIns="0">
+            <a:spAutoFit/>
+          </a:bodyPr>
+          <a:lstStyle/>
+          <a:p>
+            <a:r>
+              <a:rPr sz="900" b="0" i="0">
+                <a:solidFill>
+                  <a:srgbClr val="22303F"/>
+                </a:solidFill>
+                <a:latin typeface="Segoe UI"/>
+              </a:rPr>
+              <a:t>id_machine</a:t>
+            </a:r>
+          </a:p>
+        </p:txBody>
+      </p:sp>
+      <p:sp>
+        <p:nvSpPr>
+          <p:cNvPr id="12" name="TextBox 11"/>
+          <p:cNvSpPr txBox="1"/>
+          <p:nvPr/>
+        </p:nvSpPr>
+        <p:spPr>
+          <a:xfrm>
+            <a:off x="4974336" y="3849624"/>
+            <a:ext cx="2212848" cy="201168"/>
+          </a:xfrm>
+          <a:prstGeom prst="rect">
+            <a:avLst/>
+          </a:prstGeom>
+          <a:noFill/>
+        </p:spPr>
+        <p:txBody>
+          <a:bodyPr wrap="square" lIns="0" rIns="0" tIns="0" bIns="0">
+            <a:spAutoFit/>
+          </a:bodyPr>
+          <a:lstStyle/>
+          <a:p>
+            <a:r>
+              <a:rPr sz="900" b="0" i="0">
+                <a:solidFill>
+                  <a:srgbClr val="22303F"/>
+                </a:solidFill>
+                <a:latin typeface="Segoe UI"/>
+              </a:rPr>
+              <a:t>id_type_evenement</a:t>
+            </a:r>
+          </a:p>
+        </p:txBody>
+      </p:sp>
+      <p:sp>
+        <p:nvSpPr>
+          <p:cNvPr id="13" name="TextBox 12"/>
+          <p:cNvSpPr txBox="1"/>
+          <p:nvPr/>
+        </p:nvSpPr>
+        <p:spPr>
+          <a:xfrm>
+            <a:off x="4974336" y="4050791"/>
+            <a:ext cx="2212848" cy="201168"/>
+          </a:xfrm>
+          <a:prstGeom prst="rect">
+            <a:avLst/>
+          </a:prstGeom>
+          <a:noFill/>
+        </p:spPr>
+        <p:txBody>
+          <a:bodyPr wrap="square" lIns="0" rIns="0" tIns="0" bIns="0">
+            <a:spAutoFit/>
+          </a:bodyPr>
+          <a:lstStyle/>
+          <a:p>
+            <a:r>
+              <a:rPr sz="900" b="0" i="0">
+                <a:solidFill>
+                  <a:srgbClr val="22303F"/>
+                </a:solidFill>
+                <a:latin typeface="Segoe UI"/>
+              </a:rPr>
+              <a:t>id_code</a:t>
+            </a:r>
+          </a:p>
+        </p:txBody>
+      </p:sp>
+      <p:sp>
+        <p:nvSpPr>
+          <p:cNvPr id="14" name="TextBox 13"/>
+          <p:cNvSpPr txBox="1"/>
+          <p:nvPr/>
+        </p:nvSpPr>
+        <p:spPr>
+          <a:xfrm>
+            <a:off x="4974336" y="4251959"/>
+            <a:ext cx="2212848" cy="201168"/>
+          </a:xfrm>
+          <a:prstGeom prst="rect">
+            <a:avLst/>
+          </a:prstGeom>
+          <a:noFill/>
+        </p:spPr>
+        <p:txBody>
+          <a:bodyPr wrap="square" lIns="0" rIns="0" tIns="0" bIns="0">
+            <a:spAutoFit/>
+          </a:bodyPr>
+          <a:lstStyle/>
+          <a:p>
+            <a:r>
+              <a:rPr sz="900" b="0" i="0">
+                <a:solidFill>
+                  <a:srgbClr val="22303F"/>
+                </a:solidFill>
+                <a:latin typeface="Segoe UI"/>
+              </a:rPr>
+              <a:t>id_operateur (null)</a:t>
+            </a:r>
+          </a:p>
+        </p:txBody>
+      </p:sp>
+      <p:sp>
+        <p:nvSpPr>
+          <p:cNvPr id="15" name="TextBox 14"/>
+          <p:cNvSpPr txBox="1"/>
+          <p:nvPr/>
+        </p:nvSpPr>
+        <p:spPr>
+          <a:xfrm>
+            <a:off x="4974336" y="4453127"/>
+            <a:ext cx="2212848" cy="201168"/>
+          </a:xfrm>
+          <a:prstGeom prst="rect">
+            <a:avLst/>
+          </a:prstGeom>
+          <a:noFill/>
+        </p:spPr>
+        <p:txBody>
+          <a:bodyPr wrap="square" lIns="0" rIns="0" tIns="0" bIns="0">
+            <a:spAutoFit/>
+          </a:bodyPr>
+          <a:lstStyle/>
+          <a:p>
+            <a:r>
+              <a:rPr sz="900" b="0" i="0">
+                <a:solidFill>
+                  <a:srgbClr val="22303F"/>
+                </a:solidFill>
+                <a:latin typeface="Segoe UI"/>
+              </a:rPr>
+              <a:t>source_fichier</a:t>
+            </a:r>
+          </a:p>
+        </p:txBody>
+      </p:sp>
+      <p:sp>
+        <p:nvSpPr>
+          <p:cNvPr id="16" name="Rectangle 15"/>
+          <p:cNvSpPr/>
+          <p:nvPr/>
+        </p:nvSpPr>
+        <p:spPr>
+          <a:xfrm>
+            <a:off x="5029200" y="1097280"/>
+            <a:ext cx="2103120" cy="987552"/>
+          </a:xfrm>
+          <a:prstGeom prst="rect">
+            <a:avLst/>
+          </a:prstGeom>
+          <a:solidFill>
+            <a:srgbClr val="FFFFFF"/>
+          </a:solidFill>
+          <a:ln w="16510">
+            <a:solidFill>
+              <a:srgbClr val="0B2947"/>
+            </a:solidFill>
+          </a:ln>
+          <a:effectLst/>
+        </p:spPr>
+        <p:style>
+          <a:lnRef idx="1">
+            <a:schemeClr val="accent1"/>
+          </a:lnRef>
+          <a:fillRef idx="3">
+            <a:schemeClr val="accent1"/>
+          </a:fillRef>
+          <a:effectRef idx="2">
+            <a:schemeClr val="accent1"/>
+          </a:effectRef>
+          <a:fontRef idx="minor">
+            <a:schemeClr val="lt1"/>
+          </a:fontRef>
+        </p:style>
+        <p:txBody>
+          <a:bodyPr rtlCol="0" anchor="ctr"/>
+          <a:lstStyle/>
+          <a:p>
+            <a:pPr algn="ctr"/>
+          </a:p>
+        </p:txBody>
+      </p:sp>
+      <p:sp>
+        <p:nvSpPr>
+          <p:cNvPr id="17" name="Rectangle 16"/>
+          <p:cNvSpPr/>
+          <p:nvPr/>
+        </p:nvSpPr>
+        <p:spPr>
+          <a:xfrm>
+            <a:off x="5029200" y="1097280"/>
+            <a:ext cx="2103120" cy="292608"/>
+          </a:xfrm>
+          <a:prstGeom prst="rect">
+            <a:avLst/>
+          </a:prstGeom>
+          <a:solidFill>
+            <a:srgbClr val="0B2947"/>
+          </a:solidFill>
+          <a:ln>
+            <a:noFill/>
+          </a:ln>
+          <a:effectLst/>
+        </p:spPr>
+        <p:style>
+          <a:lnRef idx="1">
+            <a:schemeClr val="accent1"/>
+          </a:lnRef>
+          <a:fillRef idx="3">
+            <a:schemeClr val="accent1"/>
+          </a:fillRef>
+          <a:effectRef idx="2">
+            <a:schemeClr val="accent1"/>
+          </a:effectRef>
+          <a:fontRef idx="minor">
+            <a:schemeClr val="lt1"/>
+          </a:fontRef>
+        </p:style>
+        <p:txBody>
+          <a:bodyPr rtlCol="0" anchor="ctr"/>
+          <a:lstStyle/>
+          <a:p>
+            <a:pPr algn="ctr"/>
+          </a:p>
+        </p:txBody>
+      </p:sp>
+      <p:sp>
+        <p:nvSpPr>
+          <p:cNvPr id="18" name="TextBox 17"/>
+          <p:cNvSpPr txBox="1"/>
+          <p:nvPr/>
+        </p:nvSpPr>
+        <p:spPr>
+          <a:xfrm>
+            <a:off x="5120640" y="1097280"/>
+            <a:ext cx="1920239" cy="292608"/>
+          </a:xfrm>
+          <a:prstGeom prst="rect">
+            <a:avLst/>
+          </a:prstGeom>
+          <a:noFill/>
+        </p:spPr>
+        <p:txBody>
+          <a:bodyPr wrap="square" lIns="0" rIns="0" tIns="0" bIns="0" anchor="ctr">
+            <a:spAutoFit/>
+          </a:bodyPr>
+          <a:lstStyle/>
+          <a:p>
+            <a:pPr algn="l"/>
+            <a:r>
+              <a:rPr sz="1050" b="1" i="0">
+                <a:solidFill>
+                  <a:srgbClr val="FFFFFF"/>
+                </a:solidFill>
+                <a:latin typeface="Segoe UI"/>
+              </a:rPr>
+              <a:t>DIM_DATE</a:t>
+            </a:r>
+          </a:p>
+        </p:txBody>
+      </p:sp>
+      <p:sp>
+        <p:nvSpPr>
+          <p:cNvPr id="19" name="TextBox 18"/>
+          <p:cNvSpPr txBox="1"/>
+          <p:nvPr/>
+        </p:nvSpPr>
+        <p:spPr>
+          <a:xfrm>
+            <a:off x="5157216" y="1435608"/>
+            <a:ext cx="1847087" cy="201168"/>
+          </a:xfrm>
+          <a:prstGeom prst="rect">
+            <a:avLst/>
+          </a:prstGeom>
+          <a:noFill/>
+        </p:spPr>
+        <p:txBody>
+          <a:bodyPr wrap="square" lIns="0" rIns="0" tIns="0" bIns="0">
+            <a:spAutoFit/>
+          </a:bodyPr>
+          <a:lstStyle/>
+          <a:p>
+            <a:r>
+              <a:rPr sz="930" b="0" i="0" u="sng">
+                <a:solidFill>
+                  <a:srgbClr val="22303F"/>
+                </a:solidFill>
+                <a:latin typeface="Segoe UI"/>
+              </a:rPr>
+              <a:t>id_date (id)</a:t>
+            </a:r>
+          </a:p>
+        </p:txBody>
+      </p:sp>
+      <p:sp>
+        <p:nvSpPr>
+          <p:cNvPr id="20" name="TextBox 19"/>
+          <p:cNvSpPr txBox="1"/>
+          <p:nvPr/>
+        </p:nvSpPr>
+        <p:spPr>
+          <a:xfrm>
+            <a:off x="5157216" y="1636776"/>
+            <a:ext cx="1847087" cy="201168"/>
+          </a:xfrm>
+          <a:prstGeom prst="rect">
+            <a:avLst/>
+          </a:prstGeom>
+          <a:noFill/>
+        </p:spPr>
+        <p:txBody>
+          <a:bodyPr wrap="square" lIns="0" rIns="0" tIns="0" bIns="0">
+            <a:spAutoFit/>
+          </a:bodyPr>
+          <a:lstStyle/>
+          <a:p>
+            <a:r>
+              <a:rPr sz="930" b="0" i="0">
+                <a:solidFill>
+                  <a:srgbClr val="22303F"/>
+                </a:solidFill>
+                <a:latin typeface="Segoe UI"/>
+              </a:rPr>
+              <a:t>date_complete</a:t>
+            </a:r>
+          </a:p>
+        </p:txBody>
+      </p:sp>
+      <p:sp>
+        <p:nvSpPr>
+          <p:cNvPr id="21" name="TextBox 20"/>
+          <p:cNvSpPr txBox="1"/>
+          <p:nvPr/>
+        </p:nvSpPr>
+        <p:spPr>
+          <a:xfrm>
+            <a:off x="5157216" y="1837944"/>
+            <a:ext cx="1847087" cy="201168"/>
+          </a:xfrm>
+          <a:prstGeom prst="rect">
+            <a:avLst/>
+          </a:prstGeom>
+          <a:noFill/>
+        </p:spPr>
+        <p:txBody>
+          <a:bodyPr wrap="square" lIns="0" rIns="0" tIns="0" bIns="0">
+            <a:spAutoFit/>
+          </a:bodyPr>
+          <a:lstStyle/>
+          <a:p>
+            <a:r>
+              <a:rPr sz="930" b="0" i="0">
+                <a:solidFill>
+                  <a:srgbClr val="22303F"/>
+                </a:solidFill>
+                <a:latin typeface="Segoe UI"/>
+              </a:rPr>
+              <a:t>annee / mois / jour</a:t>
+            </a:r>
+          </a:p>
+        </p:txBody>
+      </p:sp>
+      <p:sp>
+        <p:nvSpPr>
+          <p:cNvPr id="22" name="Rectangle 21"/>
+          <p:cNvSpPr/>
+          <p:nvPr/>
+        </p:nvSpPr>
+        <p:spPr>
+          <a:xfrm>
+            <a:off x="8229600" y="3209544"/>
+            <a:ext cx="2103120" cy="987552"/>
+          </a:xfrm>
+          <a:prstGeom prst="rect">
+            <a:avLst/>
+          </a:prstGeom>
+          <a:solidFill>
+            <a:srgbClr val="FFFFFF"/>
+          </a:solidFill>
+          <a:ln w="16510">
+            <a:solidFill>
+              <a:srgbClr val="0B2947"/>
+            </a:solidFill>
+          </a:ln>
+          <a:effectLst/>
+        </p:spPr>
+        <p:style>
+          <a:lnRef idx="1">
+            <a:schemeClr val="accent1"/>
+          </a:lnRef>
+          <a:fillRef idx="3">
+            <a:schemeClr val="accent1"/>
+          </a:fillRef>
+          <a:effectRef idx="2">
+            <a:schemeClr val="accent1"/>
+          </a:effectRef>
+          <a:fontRef idx="minor">
+            <a:schemeClr val="lt1"/>
+          </a:fontRef>
+        </p:style>
+        <p:txBody>
+          <a:bodyPr rtlCol="0" anchor="ctr"/>
+          <a:lstStyle/>
+          <a:p>
+            <a:pPr algn="ctr"/>
+          </a:p>
+        </p:txBody>
+      </p:sp>
+      <p:sp>
+        <p:nvSpPr>
+          <p:cNvPr id="23" name="Rectangle 22"/>
+          <p:cNvSpPr/>
+          <p:nvPr/>
+        </p:nvSpPr>
+        <p:spPr>
+          <a:xfrm>
+            <a:off x="8229600" y="3209544"/>
+            <a:ext cx="2103120" cy="292608"/>
+          </a:xfrm>
+          <a:prstGeom prst="rect">
+            <a:avLst/>
+          </a:prstGeom>
+          <a:solidFill>
+            <a:srgbClr val="0B2947"/>
+          </a:solidFill>
+          <a:ln>
+            <a:noFill/>
+          </a:ln>
+          <a:effectLst/>
+        </p:spPr>
+        <p:style>
+          <a:lnRef idx="1">
+            <a:schemeClr val="accent1"/>
+          </a:lnRef>
+          <a:fillRef idx="3">
+            <a:schemeClr val="accent1"/>
+          </a:fillRef>
+          <a:effectRef idx="2">
+            <a:schemeClr val="accent1"/>
+          </a:effectRef>
+          <a:fontRef idx="minor">
+            <a:schemeClr val="lt1"/>
+          </a:fontRef>
+        </p:style>
+        <p:txBody>
+          <a:bodyPr rtlCol="0" anchor="ctr"/>
+          <a:lstStyle/>
+          <a:p>
+            <a:pPr algn="ctr"/>
+          </a:p>
+        </p:txBody>
+      </p:sp>
+      <p:sp>
+        <p:nvSpPr>
+          <p:cNvPr id="24" name="TextBox 23"/>
+          <p:cNvSpPr txBox="1"/>
+          <p:nvPr/>
+        </p:nvSpPr>
+        <p:spPr>
+          <a:xfrm>
+            <a:off x="8321040" y="3209544"/>
+            <a:ext cx="1920239" cy="292608"/>
+          </a:xfrm>
+          <a:prstGeom prst="rect">
+            <a:avLst/>
+          </a:prstGeom>
+          <a:noFill/>
+        </p:spPr>
+        <p:txBody>
+          <a:bodyPr wrap="square" lIns="0" rIns="0" tIns="0" bIns="0" anchor="ctr">
+            <a:spAutoFit/>
+          </a:bodyPr>
+          <a:lstStyle/>
+          <a:p>
+            <a:pPr algn="l"/>
+            <a:r>
+              <a:rPr sz="1050" b="1" i="0">
+                <a:solidFill>
+                  <a:srgbClr val="FFFFFF"/>
+                </a:solidFill>
+                <a:latin typeface="Segoe UI"/>
+              </a:rPr>
+              <a:t>DIM_MACHINE</a:t>
+            </a:r>
+          </a:p>
+        </p:txBody>
+      </p:sp>
+      <p:sp>
+        <p:nvSpPr>
+          <p:cNvPr id="25" name="TextBox 24"/>
+          <p:cNvSpPr txBox="1"/>
+          <p:nvPr/>
+        </p:nvSpPr>
+        <p:spPr>
+          <a:xfrm>
+            <a:off x="8357616" y="3547871"/>
+            <a:ext cx="1847087" cy="201168"/>
+          </a:xfrm>
+          <a:prstGeom prst="rect">
+            <a:avLst/>
+          </a:prstGeom>
+          <a:noFill/>
+        </p:spPr>
+        <p:txBody>
+          <a:bodyPr wrap="square" lIns="0" rIns="0" tIns="0" bIns="0">
+            <a:spAutoFit/>
+          </a:bodyPr>
+          <a:lstStyle/>
+          <a:p>
+            <a:r>
+              <a:rPr sz="930" b="0" i="0" u="sng">
+                <a:solidFill>
+                  <a:srgbClr val="22303F"/>
+                </a:solidFill>
+                <a:latin typeface="Segoe UI"/>
+              </a:rPr>
+              <a:t>id_machine (id)</a:t>
+            </a:r>
+          </a:p>
+        </p:txBody>
+      </p:sp>
+      <p:sp>
+        <p:nvSpPr>
+          <p:cNvPr id="26" name="TextBox 25"/>
+          <p:cNvSpPr txBox="1"/>
+          <p:nvPr/>
+        </p:nvSpPr>
+        <p:spPr>
+          <a:xfrm>
+            <a:off x="8357616" y="3749039"/>
+            <a:ext cx="1847087" cy="201168"/>
+          </a:xfrm>
+          <a:prstGeom prst="rect">
+            <a:avLst/>
+          </a:prstGeom>
+          <a:noFill/>
+        </p:spPr>
+        <p:txBody>
+          <a:bodyPr wrap="square" lIns="0" rIns="0" tIns="0" bIns="0">
+            <a:spAutoFit/>
+          </a:bodyPr>
+          <a:lstStyle/>
+          <a:p>
+            <a:r>
+              <a:rPr sz="930" b="0" i="0">
+                <a:solidFill>
+                  <a:srgbClr val="22303F"/>
+                </a:solidFill>
+                <a:latin typeface="Segoe UI"/>
+              </a:rPr>
+              <a:t>machine_id_nat</a:t>
+            </a:r>
+          </a:p>
+        </p:txBody>
+      </p:sp>
+      <p:sp>
+        <p:nvSpPr>
+          <p:cNvPr id="27" name="TextBox 26"/>
+          <p:cNvSpPr txBox="1"/>
+          <p:nvPr/>
+        </p:nvSpPr>
+        <p:spPr>
+          <a:xfrm>
+            <a:off x="8357616" y="3950207"/>
+            <a:ext cx="1847087" cy="201168"/>
+          </a:xfrm>
+          <a:prstGeom prst="rect">
+            <a:avLst/>
+          </a:prstGeom>
+          <a:noFill/>
+        </p:spPr>
+        <p:txBody>
+          <a:bodyPr wrap="square" lIns="0" rIns="0" tIns="0" bIns="0">
+            <a:spAutoFit/>
+          </a:bodyPr>
+          <a:lstStyle/>
+          <a:p>
+            <a:r>
+              <a:rPr sz="930" b="0" i="0">
+                <a:solidFill>
+                  <a:srgbClr val="22303F"/>
+                </a:solidFill>
+                <a:latin typeface="Segoe UI"/>
+              </a:rPr>
+              <a:t>model, age, tranche_age</a:t>
+            </a:r>
+          </a:p>
+        </p:txBody>
+      </p:sp>
+      <p:sp>
+        <p:nvSpPr>
+          <p:cNvPr id="28" name="Rectangle 27"/>
+          <p:cNvSpPr/>
+          <p:nvPr/>
+        </p:nvSpPr>
+        <p:spPr>
+          <a:xfrm>
+            <a:off x="8092440" y="5074920"/>
+            <a:ext cx="2103120" cy="987552"/>
+          </a:xfrm>
+          <a:prstGeom prst="rect">
+            <a:avLst/>
+          </a:prstGeom>
+          <a:solidFill>
+            <a:srgbClr val="FFFFFF"/>
+          </a:solidFill>
+          <a:ln w="16510">
+            <a:solidFill>
+              <a:srgbClr val="0B2947"/>
+            </a:solidFill>
+          </a:ln>
+          <a:effectLst/>
+        </p:spPr>
+        <p:style>
+          <a:lnRef idx="1">
+            <a:schemeClr val="accent1"/>
+          </a:lnRef>
+          <a:fillRef idx="3">
+            <a:schemeClr val="accent1"/>
+          </a:fillRef>
+          <a:effectRef idx="2">
+            <a:schemeClr val="accent1"/>
+          </a:effectRef>
+          <a:fontRef idx="minor">
+            <a:schemeClr val="lt1"/>
+          </a:fontRef>
+        </p:style>
+        <p:txBody>
+          <a:bodyPr rtlCol="0" anchor="ctr"/>
+          <a:lstStyle/>
+          <a:p>
+            <a:pPr algn="ctr"/>
+          </a:p>
+        </p:txBody>
+      </p:sp>
+      <p:sp>
+        <p:nvSpPr>
+          <p:cNvPr id="29" name="Rectangle 28"/>
+          <p:cNvSpPr/>
+          <p:nvPr/>
+        </p:nvSpPr>
+        <p:spPr>
+          <a:xfrm>
+            <a:off x="8092440" y="5074920"/>
+            <a:ext cx="2103120" cy="292608"/>
+          </a:xfrm>
+          <a:prstGeom prst="rect">
+            <a:avLst/>
+          </a:prstGeom>
+          <a:solidFill>
+            <a:srgbClr val="0B2947"/>
+          </a:solidFill>
+          <a:ln>
+            <a:noFill/>
+          </a:ln>
+          <a:effectLst/>
+        </p:spPr>
+        <p:style>
+          <a:lnRef idx="1">
+            <a:schemeClr val="accent1"/>
+          </a:lnRef>
+          <a:fillRef idx="3">
+            <a:schemeClr val="accent1"/>
+          </a:fillRef>
+          <a:effectRef idx="2">
+            <a:schemeClr val="accent1"/>
+          </a:effectRef>
+          <a:fontRef idx="minor">
+            <a:schemeClr val="lt1"/>
+          </a:fontRef>
+        </p:style>
+        <p:txBody>
+          <a:bodyPr rtlCol="0" anchor="ctr"/>
+          <a:lstStyle/>
+          <a:p>
+            <a:pPr algn="ctr"/>
+          </a:p>
+        </p:txBody>
+      </p:sp>
+      <p:sp>
+        <p:nvSpPr>
+          <p:cNvPr id="30" name="TextBox 29"/>
+          <p:cNvSpPr txBox="1"/>
+          <p:nvPr/>
+        </p:nvSpPr>
+        <p:spPr>
+          <a:xfrm>
+            <a:off x="8183879" y="5074920"/>
+            <a:ext cx="1920239" cy="292608"/>
+          </a:xfrm>
+          <a:prstGeom prst="rect">
+            <a:avLst/>
+          </a:prstGeom>
+          <a:noFill/>
+        </p:spPr>
+        <p:txBody>
+          <a:bodyPr wrap="square" lIns="0" rIns="0" tIns="0" bIns="0" anchor="ctr">
+            <a:spAutoFit/>
+          </a:bodyPr>
+          <a:lstStyle/>
+          <a:p>
+            <a:pPr algn="l"/>
+            <a:r>
+              <a:rPr sz="1050" b="1" i="0">
+                <a:solidFill>
+                  <a:srgbClr val="FFFFFF"/>
+                </a:solidFill>
+                <a:latin typeface="Segoe UI"/>
+              </a:rPr>
+              <a:t>DIM_TYPE_EVENEMENT</a:t>
+            </a:r>
+          </a:p>
+        </p:txBody>
+      </p:sp>
+      <p:sp>
+        <p:nvSpPr>
+          <p:cNvPr id="31" name="TextBox 30"/>
+          <p:cNvSpPr txBox="1"/>
+          <p:nvPr/>
+        </p:nvSpPr>
+        <p:spPr>
+          <a:xfrm>
+            <a:off x="8220456" y="5413248"/>
+            <a:ext cx="1847087" cy="201168"/>
+          </a:xfrm>
+          <a:prstGeom prst="rect">
+            <a:avLst/>
+          </a:prstGeom>
+          <a:noFill/>
+        </p:spPr>
+        <p:txBody>
+          <a:bodyPr wrap="square" lIns="0" rIns="0" tIns="0" bIns="0">
+            <a:spAutoFit/>
+          </a:bodyPr>
+          <a:lstStyle/>
+          <a:p>
+            <a:r>
+              <a:rPr sz="930" b="0" i="0" u="sng">
+                <a:solidFill>
+                  <a:srgbClr val="22303F"/>
+                </a:solidFill>
+                <a:latin typeface="Segoe UI"/>
+              </a:rPr>
+              <a:t>id_type_evenement (id)</a:t>
+            </a:r>
+          </a:p>
+        </p:txBody>
+      </p:sp>
+      <p:sp>
+        <p:nvSpPr>
+          <p:cNvPr id="32" name="TextBox 31"/>
+          <p:cNvSpPr txBox="1"/>
+          <p:nvPr/>
+        </p:nvSpPr>
+        <p:spPr>
+          <a:xfrm>
+            <a:off x="8220456" y="5614416"/>
+            <a:ext cx="1847087" cy="201168"/>
+          </a:xfrm>
+          <a:prstGeom prst="rect">
+            <a:avLst/>
+          </a:prstGeom>
+          <a:noFill/>
+        </p:spPr>
+        <p:txBody>
+          <a:bodyPr wrap="square" lIns="0" rIns="0" tIns="0" bIns="0">
+            <a:spAutoFit/>
+          </a:bodyPr>
+          <a:lstStyle/>
+          <a:p>
+            <a:r>
+              <a:rPr sz="930" b="0" i="0">
+                <a:solidFill>
+                  <a:srgbClr val="22303F"/>
+                </a:solidFill>
+                <a:latin typeface="Segoe UI"/>
+              </a:rPr>
+              <a:t>code_type</a:t>
+            </a:r>
+          </a:p>
+        </p:txBody>
+      </p:sp>
+      <p:sp>
+        <p:nvSpPr>
+          <p:cNvPr id="33" name="TextBox 32"/>
+          <p:cNvSpPr txBox="1"/>
+          <p:nvPr/>
+        </p:nvSpPr>
+        <p:spPr>
+          <a:xfrm>
+            <a:off x="8220456" y="5815584"/>
+            <a:ext cx="1847087" cy="201168"/>
+          </a:xfrm>
+          <a:prstGeom prst="rect">
+            <a:avLst/>
+          </a:prstGeom>
+          <a:noFill/>
+        </p:spPr>
+        <p:txBody>
+          <a:bodyPr wrap="square" lIns="0" rIns="0" tIns="0" bIns="0">
+            <a:spAutoFit/>
+          </a:bodyPr>
+          <a:lstStyle/>
+          <a:p>
+            <a:r>
+              <a:rPr sz="930" b="0" i="0">
+                <a:solidFill>
+                  <a:srgbClr val="22303F"/>
+                </a:solidFill>
+                <a:latin typeface="Segoe UI"/>
+              </a:rPr>
+              <a:t>libelle</a:t>
+            </a:r>
+          </a:p>
+        </p:txBody>
+      </p:sp>
+      <p:sp>
+        <p:nvSpPr>
+          <p:cNvPr id="34" name="Rectangle 33"/>
+          <p:cNvSpPr/>
+          <p:nvPr/>
+        </p:nvSpPr>
+        <p:spPr>
+          <a:xfrm>
+            <a:off x="2331720" y="5074920"/>
+            <a:ext cx="2103120" cy="987552"/>
+          </a:xfrm>
+          <a:prstGeom prst="rect">
+            <a:avLst/>
+          </a:prstGeom>
+          <a:solidFill>
+            <a:srgbClr val="FFFFFF"/>
+          </a:solidFill>
+          <a:ln w="16510">
+            <a:solidFill>
+              <a:srgbClr val="0B2947"/>
+            </a:solidFill>
+          </a:ln>
+          <a:effectLst/>
+        </p:spPr>
+        <p:style>
+          <a:lnRef idx="1">
+            <a:schemeClr val="accent1"/>
+          </a:lnRef>
+          <a:fillRef idx="3">
+            <a:schemeClr val="accent1"/>
+          </a:fillRef>
+          <a:effectRef idx="2">
+            <a:schemeClr val="accent1"/>
+          </a:effectRef>
+          <a:fontRef idx="minor">
+            <a:schemeClr val="lt1"/>
+          </a:fontRef>
+        </p:style>
+        <p:txBody>
+          <a:bodyPr rtlCol="0" anchor="ctr"/>
+          <a:lstStyle/>
+          <a:p>
+            <a:pPr algn="ctr"/>
+          </a:p>
+        </p:txBody>
+      </p:sp>
+      <p:sp>
+        <p:nvSpPr>
+          <p:cNvPr id="35" name="Rectangle 34"/>
+          <p:cNvSpPr/>
+          <p:nvPr/>
+        </p:nvSpPr>
+        <p:spPr>
+          <a:xfrm>
+            <a:off x="2331720" y="5074920"/>
+            <a:ext cx="2103120" cy="292608"/>
+          </a:xfrm>
+          <a:prstGeom prst="rect">
+            <a:avLst/>
+          </a:prstGeom>
+          <a:solidFill>
+            <a:srgbClr val="0B2947"/>
+          </a:solidFill>
+          <a:ln>
+            <a:noFill/>
+          </a:ln>
+          <a:effectLst/>
+        </p:spPr>
+        <p:style>
+          <a:lnRef idx="1">
+            <a:schemeClr val="accent1"/>
+          </a:lnRef>
+          <a:fillRef idx="3">
+            <a:schemeClr val="accent1"/>
+          </a:fillRef>
+          <a:effectRef idx="2">
+            <a:schemeClr val="accent1"/>
+          </a:effectRef>
+          <a:fontRef idx="minor">
+            <a:schemeClr val="lt1"/>
+          </a:fontRef>
+        </p:style>
+        <p:txBody>
+          <a:bodyPr rtlCol="0" anchor="ctr"/>
+          <a:lstStyle/>
+          <a:p>
+            <a:pPr algn="ctr"/>
+          </a:p>
+        </p:txBody>
+      </p:sp>
+      <p:sp>
+        <p:nvSpPr>
+          <p:cNvPr id="36" name="TextBox 35"/>
+          <p:cNvSpPr txBox="1"/>
+          <p:nvPr/>
+        </p:nvSpPr>
+        <p:spPr>
+          <a:xfrm>
+            <a:off x="2423160" y="5074920"/>
+            <a:ext cx="1920239" cy="292608"/>
+          </a:xfrm>
+          <a:prstGeom prst="rect">
+            <a:avLst/>
+          </a:prstGeom>
+          <a:noFill/>
+        </p:spPr>
+        <p:txBody>
+          <a:bodyPr wrap="square" lIns="0" rIns="0" tIns="0" bIns="0" anchor="ctr">
+            <a:spAutoFit/>
+          </a:bodyPr>
+          <a:lstStyle/>
+          <a:p>
+            <a:pPr algn="l"/>
+            <a:r>
+              <a:rPr sz="1050" b="1" i="0">
+                <a:solidFill>
+                  <a:srgbClr val="FFFFFF"/>
+                </a:solidFill>
+                <a:latin typeface="Segoe UI"/>
+              </a:rPr>
+              <a:t>DIM_CODE_EVENEMENT</a:t>
+            </a:r>
+          </a:p>
+        </p:txBody>
+      </p:sp>
+      <p:sp>
+        <p:nvSpPr>
+          <p:cNvPr id="37" name="TextBox 36"/>
+          <p:cNvSpPr txBox="1"/>
+          <p:nvPr/>
+        </p:nvSpPr>
+        <p:spPr>
+          <a:xfrm>
+            <a:off x="2459736" y="5413248"/>
+            <a:ext cx="1847087" cy="201168"/>
+          </a:xfrm>
+          <a:prstGeom prst="rect">
+            <a:avLst/>
+          </a:prstGeom>
+          <a:noFill/>
+        </p:spPr>
+        <p:txBody>
+          <a:bodyPr wrap="square" lIns="0" rIns="0" tIns="0" bIns="0">
+            <a:spAutoFit/>
+          </a:bodyPr>
+          <a:lstStyle/>
+          <a:p>
+            <a:r>
+              <a:rPr sz="930" b="0" i="0" u="sng">
+                <a:solidFill>
+                  <a:srgbClr val="22303F"/>
+                </a:solidFill>
+                <a:latin typeface="Segoe UI"/>
+              </a:rPr>
+              <a:t>id_code (id)</a:t>
+            </a:r>
+          </a:p>
+        </p:txBody>
+      </p:sp>
+      <p:sp>
+        <p:nvSpPr>
+          <p:cNvPr id="38" name="TextBox 37"/>
+          <p:cNvSpPr txBox="1"/>
+          <p:nvPr/>
+        </p:nvSpPr>
+        <p:spPr>
+          <a:xfrm>
+            <a:off x="2459736" y="5614416"/>
+            <a:ext cx="1847087" cy="201168"/>
+          </a:xfrm>
+          <a:prstGeom prst="rect">
+            <a:avLst/>
+          </a:prstGeom>
+          <a:noFill/>
+        </p:spPr>
+        <p:txBody>
+          <a:bodyPr wrap="square" lIns="0" rIns="0" tIns="0" bIns="0">
+            <a:spAutoFit/>
+          </a:bodyPr>
+          <a:lstStyle/>
+          <a:p>
+            <a:r>
+              <a:rPr sz="930" b="0" i="0">
+                <a:solidFill>
+                  <a:srgbClr val="22303F"/>
+                </a:solidFill>
+                <a:latin typeface="Segoe UI"/>
+              </a:rPr>
+              <a:t>id_type_evenement</a:t>
+            </a:r>
+          </a:p>
+        </p:txBody>
+      </p:sp>
+      <p:sp>
+        <p:nvSpPr>
+          <p:cNvPr id="39" name="TextBox 38"/>
+          <p:cNvSpPr txBox="1"/>
+          <p:nvPr/>
+        </p:nvSpPr>
+        <p:spPr>
+          <a:xfrm>
+            <a:off x="2459736" y="5815584"/>
+            <a:ext cx="1847087" cy="201168"/>
+          </a:xfrm>
+          <a:prstGeom prst="rect">
+            <a:avLst/>
+          </a:prstGeom>
+          <a:noFill/>
+        </p:spPr>
+        <p:txBody>
+          <a:bodyPr wrap="square" lIns="0" rIns="0" tIns="0" bIns="0">
+            <a:spAutoFit/>
+          </a:bodyPr>
+          <a:lstStyle/>
+          <a:p>
+            <a:r>
+              <a:rPr sz="930" b="0" i="0">
+                <a:solidFill>
+                  <a:srgbClr val="22303F"/>
+                </a:solidFill>
+                <a:latin typeface="Segoe UI"/>
+              </a:rPr>
+              <a:t>code_brut, libelle</a:t>
+            </a:r>
+          </a:p>
+        </p:txBody>
+      </p:sp>
+      <p:sp>
+        <p:nvSpPr>
+          <p:cNvPr id="40" name="Rectangle 39"/>
+          <p:cNvSpPr/>
+          <p:nvPr/>
+        </p:nvSpPr>
+        <p:spPr>
+          <a:xfrm>
+            <a:off x="365760" y="3209544"/>
+            <a:ext cx="2103120" cy="987552"/>
+          </a:xfrm>
+          <a:prstGeom prst="rect">
+            <a:avLst/>
+          </a:prstGeom>
+          <a:solidFill>
+            <a:srgbClr val="FFFFFF"/>
+          </a:solidFill>
+          <a:ln w="16510">
+            <a:solidFill>
+              <a:srgbClr val="0B2947"/>
+            </a:solidFill>
+          </a:ln>
+          <a:effectLst/>
+        </p:spPr>
+        <p:style>
+          <a:lnRef idx="1">
+            <a:schemeClr val="accent1"/>
+          </a:lnRef>
+          <a:fillRef idx="3">
+            <a:schemeClr val="accent1"/>
+          </a:fillRef>
+          <a:effectRef idx="2">
+            <a:schemeClr val="accent1"/>
+          </a:effectRef>
+          <a:fontRef idx="minor">
+            <a:schemeClr val="lt1"/>
+          </a:fontRef>
+        </p:style>
+        <p:txBody>
+          <a:bodyPr rtlCol="0" anchor="ctr"/>
+          <a:lstStyle/>
+          <a:p>
+            <a:pPr algn="ctr"/>
+          </a:p>
+        </p:txBody>
+      </p:sp>
+      <p:sp>
+        <p:nvSpPr>
+          <p:cNvPr id="41" name="Rectangle 40"/>
+          <p:cNvSpPr/>
+          <p:nvPr/>
+        </p:nvSpPr>
+        <p:spPr>
+          <a:xfrm>
+            <a:off x="365760" y="3209544"/>
+            <a:ext cx="2103120" cy="292608"/>
+          </a:xfrm>
+          <a:prstGeom prst="rect">
+            <a:avLst/>
+          </a:prstGeom>
+          <a:solidFill>
+            <a:srgbClr val="0B2947"/>
+          </a:solidFill>
+          <a:ln>
+            <a:noFill/>
+          </a:ln>
+          <a:effectLst/>
+        </p:spPr>
+        <p:style>
+          <a:lnRef idx="1">
+            <a:schemeClr val="accent1"/>
+          </a:lnRef>
+          <a:fillRef idx="3">
+            <a:schemeClr val="accent1"/>
+          </a:fillRef>
+          <a:effectRef idx="2">
+            <a:schemeClr val="accent1"/>
+          </a:effectRef>
+          <a:fontRef idx="minor">
+            <a:schemeClr val="lt1"/>
+          </a:fontRef>
+        </p:style>
+        <p:txBody>
+          <a:bodyPr rtlCol="0" anchor="ctr"/>
+          <a:lstStyle/>
+          <a:p>
+            <a:pPr algn="ctr"/>
+          </a:p>
+        </p:txBody>
+      </p:sp>
+      <p:sp>
+        <p:nvSpPr>
+          <p:cNvPr id="42" name="TextBox 41"/>
+          <p:cNvSpPr txBox="1"/>
+          <p:nvPr/>
+        </p:nvSpPr>
+        <p:spPr>
+          <a:xfrm>
+            <a:off x="457200" y="3209544"/>
+            <a:ext cx="1920239" cy="292608"/>
+          </a:xfrm>
+          <a:prstGeom prst="rect">
+            <a:avLst/>
+          </a:prstGeom>
+          <a:noFill/>
+        </p:spPr>
+        <p:txBody>
+          <a:bodyPr wrap="square" lIns="0" rIns="0" tIns="0" bIns="0" anchor="ctr">
+            <a:spAutoFit/>
+          </a:bodyPr>
+          <a:lstStyle/>
+          <a:p>
+            <a:pPr algn="l"/>
+            <a:r>
+              <a:rPr sz="1050" b="1" i="0">
+                <a:solidFill>
+                  <a:srgbClr val="FFFFFF"/>
+                </a:solidFill>
+                <a:latin typeface="Segoe UI"/>
+              </a:rPr>
+              <a:t>DIM_OPERATEUR</a:t>
+            </a:r>
+          </a:p>
+        </p:txBody>
+      </p:sp>
+      <p:sp>
+        <p:nvSpPr>
+          <p:cNvPr id="43" name="TextBox 42"/>
+          <p:cNvSpPr txBox="1"/>
+          <p:nvPr/>
+        </p:nvSpPr>
+        <p:spPr>
+          <a:xfrm>
+            <a:off x="493776" y="3547871"/>
+            <a:ext cx="1847087" cy="201168"/>
+          </a:xfrm>
+          <a:prstGeom prst="rect">
+            <a:avLst/>
+          </a:prstGeom>
+          <a:noFill/>
+        </p:spPr>
+        <p:txBody>
+          <a:bodyPr wrap="square" lIns="0" rIns="0" tIns="0" bIns="0">
+            <a:spAutoFit/>
+          </a:bodyPr>
+          <a:lstStyle/>
+          <a:p>
+            <a:r>
+              <a:rPr sz="930" b="0" i="0" u="sng">
+                <a:solidFill>
+                  <a:srgbClr val="22303F"/>
+                </a:solidFill>
+                <a:latin typeface="Segoe UI"/>
+              </a:rPr>
+              <a:t>id_operateur (id)</a:t>
+            </a:r>
+          </a:p>
+        </p:txBody>
+      </p:sp>
+      <p:sp>
+        <p:nvSpPr>
+          <p:cNvPr id="44" name="TextBox 43"/>
+          <p:cNvSpPr txBox="1"/>
+          <p:nvPr/>
+        </p:nvSpPr>
+        <p:spPr>
+          <a:xfrm>
+            <a:off x="493776" y="3749039"/>
+            <a:ext cx="1847087" cy="201168"/>
+          </a:xfrm>
+          <a:prstGeom prst="rect">
+            <a:avLst/>
+          </a:prstGeom>
+          <a:noFill/>
+        </p:spPr>
+        <p:txBody>
+          <a:bodyPr wrap="square" lIns="0" rIns="0" tIns="0" bIns="0">
+            <a:spAutoFit/>
+          </a:bodyPr>
+          <a:lstStyle/>
+          <a:p>
+            <a:r>
+              <a:rPr sz="930" b="0" i="0">
+                <a:solidFill>
+                  <a:srgbClr val="22303F"/>
+                </a:solidFill>
+                <a:latin typeface="Segoe UI"/>
+              </a:rPr>
+              <a:t>matricule, nom</a:t>
+            </a:r>
+          </a:p>
+        </p:txBody>
+      </p:sp>
+      <p:sp>
+        <p:nvSpPr>
+          <p:cNvPr id="45" name="TextBox 44"/>
+          <p:cNvSpPr txBox="1"/>
+          <p:nvPr/>
+        </p:nvSpPr>
+        <p:spPr>
+          <a:xfrm>
+            <a:off x="493776" y="3950207"/>
+            <a:ext cx="1847087" cy="201168"/>
+          </a:xfrm>
+          <a:prstGeom prst="rect">
+            <a:avLst/>
+          </a:prstGeom>
+          <a:noFill/>
+        </p:spPr>
+        <p:txBody>
+          <a:bodyPr wrap="square" lIns="0" rIns="0" tIns="0" bIns="0">
+            <a:spAutoFit/>
+          </a:bodyPr>
+          <a:lstStyle/>
+          <a:p>
+            <a:r>
+              <a:rPr sz="930" b="0" i="0">
+                <a:solidFill>
+                  <a:srgbClr val="22303F"/>
+                </a:solidFill>
+                <a:latin typeface="Segoe UI"/>
+              </a:rPr>
+              <a:t>equipe</a:t>
+            </a:r>
+          </a:p>
+        </p:txBody>
+      </p:sp>
+      <p:sp>
+        <p:nvSpPr>
+          <p:cNvPr id="46" name="TextBox 45"/>
+          <p:cNvSpPr txBox="1"/>
+          <p:nvPr/>
+        </p:nvSpPr>
+        <p:spPr>
+          <a:xfrm>
+            <a:off x="365760" y="4224528"/>
+            <a:ext cx="2103120" cy="201168"/>
+          </a:xfrm>
+          <a:prstGeom prst="rect">
+            <a:avLst/>
+          </a:prstGeom>
+          <a:noFill/>
+        </p:spPr>
+        <p:txBody>
+          <a:bodyPr wrap="square" lIns="0" rIns="0" tIns="0" bIns="0">
+            <a:spAutoFit/>
+          </a:bodyPr>
+          <a:lstStyle/>
+          <a:p>
+            <a:pPr algn="ctr"/>
+            <a:r>
+              <a:rPr sz="700" b="0" i="1">
+                <a:solidFill>
+                  <a:srgbClr val="55606E"/>
+                </a:solidFill>
+                <a:latin typeface="Segoe UI"/>
+              </a:rPr>
+              <a:t>Anticipée (GMAO) — non peuplée</a:t>
+            </a:r>
+          </a:p>
+        </p:txBody>
+      </p:sp>
+      <p:cxnSp>
+        <p:nvCxnSpPr>
+          <p:cNvPr id="47" name="Connector 46"/>
+          <p:cNvCxnSpPr/>
+          <p:nvPr/>
+        </p:nvCxnSpPr>
+        <p:spPr>
+          <a:xfrm flipV="1">
+            <a:off x="6080760" y="2084832"/>
+            <a:ext cx="0" cy="621792"/>
+          </a:xfrm>
+          <a:prstGeom prst="line">
+            <a:avLst/>
+          </a:prstGeom>
+          <a:ln w="20320">
+            <a:solidFill>
+              <a:srgbClr val="0A66C2"/>
+            </a:solidFill>
+          </a:ln>
+        </p:spPr>
+        <p:style>
+          <a:lnRef idx="2">
+            <a:schemeClr val="accent1"/>
+          </a:lnRef>
+          <a:fillRef idx="0">
+            <a:schemeClr val="accent1"/>
+          </a:fillRef>
+          <a:effectRef idx="1">
+            <a:schemeClr val="accent1"/>
+          </a:effectRef>
+          <a:fontRef idx="minor">
+            <a:schemeClr val="tx1"/>
+          </a:fontRef>
+        </p:style>
+      </p:cxnSp>
+      <p:cxnSp>
+        <p:nvCxnSpPr>
+          <p:cNvPr id="48" name="Connector 47"/>
+          <p:cNvCxnSpPr/>
+          <p:nvPr/>
+        </p:nvCxnSpPr>
+        <p:spPr>
+          <a:xfrm>
+            <a:off x="7315200" y="3304641"/>
+            <a:ext cx="914400" cy="398679"/>
+          </a:xfrm>
+          <a:prstGeom prst="line">
+            <a:avLst/>
+          </a:prstGeom>
+          <a:ln w="20320">
+            <a:solidFill>
+              <a:srgbClr val="0A66C2"/>
+            </a:solidFill>
+          </a:ln>
+        </p:spPr>
+        <p:style>
+          <a:lnRef idx="2">
+            <a:schemeClr val="accent1"/>
+          </a:lnRef>
+          <a:fillRef idx="0">
+            <a:schemeClr val="accent1"/>
+          </a:fillRef>
+          <a:effectRef idx="1">
+            <a:schemeClr val="accent1"/>
+          </a:effectRef>
+          <a:fontRef idx="minor">
+            <a:schemeClr val="tx1"/>
+          </a:fontRef>
+        </p:style>
+      </p:cxnSp>
+      <p:cxnSp>
+        <p:nvCxnSpPr>
+          <p:cNvPr id="49" name="Connector 48"/>
+          <p:cNvCxnSpPr/>
+          <p:nvPr/>
+        </p:nvCxnSpPr>
+        <p:spPr>
+          <a:xfrm>
+            <a:off x="7315200" y="4401007"/>
+            <a:ext cx="777240" cy="1167689"/>
+          </a:xfrm>
+          <a:prstGeom prst="line">
+            <a:avLst/>
+          </a:prstGeom>
+          <a:ln w="20320">
+            <a:solidFill>
+              <a:srgbClr val="0A66C2"/>
+            </a:solidFill>
+          </a:ln>
+        </p:spPr>
+        <p:style>
+          <a:lnRef idx="2">
+            <a:schemeClr val="accent1"/>
+          </a:lnRef>
+          <a:fillRef idx="0">
+            <a:schemeClr val="accent1"/>
+          </a:fillRef>
+          <a:effectRef idx="1">
+            <a:schemeClr val="accent1"/>
+          </a:effectRef>
+          <a:fontRef idx="minor">
+            <a:schemeClr val="tx1"/>
+          </a:fontRef>
+        </p:style>
+      </p:cxnSp>
+      <p:cxnSp>
+        <p:nvCxnSpPr>
+          <p:cNvPr id="50" name="Connector 49"/>
+          <p:cNvCxnSpPr/>
+          <p:nvPr/>
+        </p:nvCxnSpPr>
+        <p:spPr>
+          <a:xfrm flipH="1">
+            <a:off x="4434840" y="4401007"/>
+            <a:ext cx="411480" cy="1167689"/>
+          </a:xfrm>
+          <a:prstGeom prst="line">
+            <a:avLst/>
+          </a:prstGeom>
+          <a:ln w="20320">
+            <a:solidFill>
+              <a:srgbClr val="0A66C2"/>
+            </a:solidFill>
+          </a:ln>
+        </p:spPr>
+        <p:style>
+          <a:lnRef idx="2">
+            <a:schemeClr val="accent1"/>
+          </a:lnRef>
+          <a:fillRef idx="0">
+            <a:schemeClr val="accent1"/>
+          </a:fillRef>
+          <a:effectRef idx="1">
+            <a:schemeClr val="accent1"/>
+          </a:effectRef>
+          <a:fontRef idx="minor">
+            <a:schemeClr val="tx1"/>
+          </a:fontRef>
+        </p:style>
+      </p:cxnSp>
+      <p:cxnSp>
+        <p:nvCxnSpPr>
+          <p:cNvPr id="51" name="Connector 50"/>
+          <p:cNvCxnSpPr/>
+          <p:nvPr/>
+        </p:nvCxnSpPr>
+        <p:spPr>
+          <a:xfrm flipH="1">
+            <a:off x="2468879" y="3304641"/>
+            <a:ext cx="2377441" cy="398679"/>
+          </a:xfrm>
+          <a:prstGeom prst="line">
+            <a:avLst/>
+          </a:prstGeom>
+          <a:ln w="20320">
+            <a:solidFill>
+              <a:srgbClr val="F5C344"/>
+            </a:solidFill>
+          </a:ln>
+        </p:spPr>
+        <p:style>
+          <a:lnRef idx="2">
+            <a:schemeClr val="accent1"/>
+          </a:lnRef>
+          <a:fillRef idx="0">
+            <a:schemeClr val="accent1"/>
+          </a:fillRef>
+          <a:effectRef idx="1">
+            <a:schemeClr val="accent1"/>
+          </a:effectRef>
+          <a:fontRef idx="minor">
+            <a:schemeClr val="tx1"/>
+          </a:fontRef>
+        </p:style>
+      </p:cxnSp>
+      <p:sp>
+        <p:nvSpPr>
+          <p:cNvPr id="52" name="Rounded Rectangle 51"/>
+          <p:cNvSpPr/>
+          <p:nvPr/>
+        </p:nvSpPr>
+        <p:spPr>
+          <a:xfrm>
+            <a:off x="411480" y="6089904"/>
+            <a:ext cx="11109960" cy="274320"/>
+          </a:xfrm>
+          <a:prstGeom prst="roundRect">
+            <a:avLst>
+              <a:gd name="adj" fmla="val 40000"/>
+            </a:avLst>
+          </a:prstGeom>
+          <a:solidFill>
+            <a:srgbClr val="FDF1D2"/>
+          </a:solidFill>
+          <a:ln>
+            <a:noFill/>
+          </a:ln>
+          <a:effectLst/>
+        </p:spPr>
+        <p:style>
+          <a:lnRef idx="1">
+            <a:schemeClr val="accent1"/>
+          </a:lnRef>
+          <a:fillRef idx="3">
+            <a:schemeClr val="accent1"/>
+          </a:fillRef>
+          <a:effectRef idx="2">
+            <a:schemeClr val="accent1"/>
+          </a:effectRef>
+          <a:fontRef idx="minor">
+            <a:schemeClr val="lt1"/>
+          </a:fontRef>
+        </p:style>
+        <p:txBody>
+          <a:bodyPr rtlCol="0" anchor="ctr"/>
+          <a:lstStyle/>
+          <a:p>
+            <a:pPr algn="ctr"/>
+          </a:p>
+        </p:txBody>
+      </p:sp>
+      <p:sp>
+        <p:nvSpPr>
+          <p:cNvPr id="53" name="Rounded Rectangle 52"/>
+          <p:cNvSpPr/>
+          <p:nvPr/>
+        </p:nvSpPr>
+        <p:spPr>
+          <a:xfrm>
+            <a:off x="685800" y="6117336"/>
+            <a:ext cx="914400" cy="219456"/>
+          </a:xfrm>
+          <a:prstGeom prst="roundRect">
+            <a:avLst>
+              <a:gd name="adj" fmla="val 50000"/>
+            </a:avLst>
+          </a:prstGeom>
+          <a:solidFill>
+            <a:srgbClr val="F5C344"/>
+          </a:solidFill>
+          <a:ln>
+            <a:noFill/>
+          </a:ln>
+          <a:effectLst/>
+        </p:spPr>
+        <p:style>
+          <a:lnRef idx="1">
+            <a:schemeClr val="accent1"/>
+          </a:lnRef>
+          <a:fillRef idx="3">
+            <a:schemeClr val="accent1"/>
+          </a:fillRef>
+          <a:effectRef idx="2">
+            <a:schemeClr val="accent1"/>
+          </a:effectRef>
+          <a:fontRef idx="minor">
+            <a:schemeClr val="lt1"/>
+          </a:fontRef>
+        </p:style>
+        <p:txBody>
+          <a:bodyPr rtlCol="0" anchor="ctr" lIns="50800" rIns="50800" tIns="0" bIns="0" wrap="square"/>
+          <a:lstStyle/>
+          <a:p>
+            <a:pPr algn="ctr"/>
+            <a:r>
+              <a:rPr sz="850" b="1" i="0">
+                <a:solidFill>
+                  <a:srgbClr val="0B2947"/>
+                </a:solidFill>
+                <a:latin typeface="Segoe UI"/>
+              </a:rPr>
+              <a:t>ERREUR</a:t>
+            </a:r>
+          </a:p>
+        </p:txBody>
+      </p:sp>
+      <p:sp>
+        <p:nvSpPr>
+          <p:cNvPr id="54" name="Rounded Rectangle 53"/>
+          <p:cNvSpPr/>
+          <p:nvPr/>
+        </p:nvSpPr>
+        <p:spPr>
+          <a:xfrm>
+            <a:off x="1691640" y="6117336"/>
+            <a:ext cx="914400" cy="219456"/>
+          </a:xfrm>
+          <a:prstGeom prst="roundRect">
+            <a:avLst>
+              <a:gd name="adj" fmla="val 50000"/>
+            </a:avLst>
+          </a:prstGeom>
+          <a:solidFill>
+            <a:srgbClr val="F5C344"/>
+          </a:solidFill>
+          <a:ln>
+            <a:noFill/>
+          </a:ln>
+          <a:effectLst/>
+        </p:spPr>
+        <p:style>
+          <a:lnRef idx="1">
+            <a:schemeClr val="accent1"/>
+          </a:lnRef>
+          <a:fillRef idx="3">
+            <a:schemeClr val="accent1"/>
+          </a:fillRef>
+          <a:effectRef idx="2">
+            <a:schemeClr val="accent1"/>
+          </a:effectRef>
+          <a:fontRef idx="minor">
+            <a:schemeClr val="lt1"/>
+          </a:fontRef>
+        </p:style>
+        <p:txBody>
+          <a:bodyPr rtlCol="0" anchor="ctr" lIns="50800" rIns="50800" tIns="0" bIns="0" wrap="square"/>
+          <a:lstStyle/>
+          <a:p>
+            <a:pPr algn="ctr"/>
+            <a:r>
+              <a:rPr sz="850" b="1" i="0">
+                <a:solidFill>
+                  <a:srgbClr val="0B2947"/>
+                </a:solidFill>
+                <a:latin typeface="Segoe UI"/>
+              </a:rPr>
+              <a:t>PANNE</a:t>
+            </a:r>
+          </a:p>
+        </p:txBody>
+      </p:sp>
+      <p:sp>
+        <p:nvSpPr>
+          <p:cNvPr id="55" name="Rounded Rectangle 54"/>
+          <p:cNvSpPr/>
+          <p:nvPr/>
+        </p:nvSpPr>
+        <p:spPr>
+          <a:xfrm>
+            <a:off x="2697480" y="6117336"/>
+            <a:ext cx="1234440" cy="219456"/>
+          </a:xfrm>
+          <a:prstGeom prst="roundRect">
+            <a:avLst>
+              <a:gd name="adj" fmla="val 50000"/>
+            </a:avLst>
+          </a:prstGeom>
+          <a:solidFill>
+            <a:srgbClr val="F5C344"/>
+          </a:solidFill>
+          <a:ln>
+            <a:noFill/>
+          </a:ln>
+          <a:effectLst/>
+        </p:spPr>
+        <p:style>
+          <a:lnRef idx="1">
+            <a:schemeClr val="accent1"/>
+          </a:lnRef>
+          <a:fillRef idx="3">
+            <a:schemeClr val="accent1"/>
+          </a:fillRef>
+          <a:effectRef idx="2">
+            <a:schemeClr val="accent1"/>
+          </a:effectRef>
+          <a:fontRef idx="minor">
+            <a:schemeClr val="lt1"/>
+          </a:fontRef>
+        </p:style>
+        <p:txBody>
+          <a:bodyPr rtlCol="0" anchor="ctr" lIns="50800" rIns="50800" tIns="0" bIns="0" wrap="square"/>
+          <a:lstStyle/>
+          <a:p>
+            <a:pPr algn="ctr"/>
+            <a:r>
+              <a:rPr sz="850" b="1" i="0">
+                <a:solidFill>
+                  <a:srgbClr val="0B2947"/>
+                </a:solidFill>
+                <a:latin typeface="Segoe UI"/>
+              </a:rPr>
+              <a:t>MAINTENANCE</a:t>
+            </a:r>
+          </a:p>
+        </p:txBody>
+      </p:sp>
+      <p:sp>
+        <p:nvSpPr>
+          <p:cNvPr id="56" name="TextBox 55"/>
+          <p:cNvSpPr txBox="1"/>
+          <p:nvPr/>
+        </p:nvSpPr>
+        <p:spPr>
+          <a:xfrm>
+            <a:off x="4069080" y="6108192"/>
+            <a:ext cx="7315200" cy="237744"/>
+          </a:xfrm>
+          <a:prstGeom prst="rect">
+            <a:avLst/>
+          </a:prstGeom>
+          <a:noFill/>
+        </p:spPr>
+        <p:txBody>
+          <a:bodyPr wrap="square" lIns="0" rIns="0" tIns="0" bIns="0" anchor="ctr">
+            <a:spAutoFit/>
+          </a:bodyPr>
+          <a:lstStyle/>
+          <a:p>
+            <a:pPr algn="l"/>
+            <a:r>
+              <a:rPr sz="860" b="0" i="1">
+                <a:solidFill>
+                  <a:srgbClr val="0B2947"/>
+                </a:solidFill>
+                <a:latin typeface="Segoe UI"/>
+              </a:rPr>
+              <a:t>→ fusionnées ici en UNE table de faits, distinguées par id_type_evenement (voir page 2 pour le détail conceptuel)</a:t>
+            </a:r>
+          </a:p>
+        </p:txBody>
+      </p:sp>
+      <p:sp>
+        <p:nvSpPr>
+          <p:cNvPr id="57" name="TextBox 56"/>
+          <p:cNvSpPr txBox="1"/>
+          <p:nvPr/>
+        </p:nvSpPr>
+        <p:spPr>
+          <a:xfrm>
+            <a:off x="365760" y="6473952"/>
+            <a:ext cx="5029200" cy="274320"/>
+          </a:xfrm>
+          <a:prstGeom prst="rect">
+            <a:avLst/>
+          </a:prstGeom>
+          <a:noFill/>
+        </p:spPr>
+        <p:txBody>
+          <a:bodyPr wrap="square" lIns="0" rIns="0" tIns="0" bIns="0">
+            <a:spAutoFit/>
+          </a:bodyPr>
+          <a:lstStyle/>
+          <a:p>
+            <a:pPr algn="l"/>
+            <a:r>
+              <a:rPr sz="900" b="0" i="0">
+                <a:solidFill>
+                  <a:srgbClr val="55606E"/>
+                </a:solidFill>
+                <a:latin typeface="Segoe UI"/>
+              </a:rPr>
+              <a:t>Bloc 2 — Architecture de données pour l'IA</a:t>
+            </a:r>
+          </a:p>
+        </p:txBody>
+      </p:sp>
+      <p:sp>
+        <p:nvSpPr>
+          <p:cNvPr id="58" name="Rounded Rectangle 57"/>
           <p:cNvSpPr/>
           <p:nvPr/>
         </p:nvSpPr>

--- a/diagram/architecture-edge-cloud.pptx
+++ b/diagram/architecture-edge-cloud.pptx
@@ -4546,7 +4546,7 @@
                 </a:solidFill>
                 <a:latin typeface="Segoe UI"/>
               </a:rPr>
-              <a:t>Broker d'ingestion — Kafka managé (OVHcloud)</a:t>
+              <a:t>Broker d'ingestion — Kafka auto-hébergé (VM dédiée)</a:t>
             </a:r>
           </a:p>
         </p:txBody>
@@ -5462,7 +5462,7 @@
                 </a:solidFill>
                 <a:latin typeface="Segoe UI"/>
               </a:rPr>
-              <a:t>ClickHouse managé</a:t>
+              <a:t>ClickHouse (VM)</a:t>
             </a:r>
           </a:p>
         </p:txBody>

--- a/diagram/architecture-edge-cloud.pptx
+++ b/diagram/architecture-edge-cloud.pptx
@@ -3207,7 +3207,7 @@
                 </a:solidFill>
                 <a:latin typeface="Segoe UI"/>
               </a:rPr>
-              <a:t>Bloc 2 — Architecture hybride Edge / Cloud  ·  Dataset Microsoft Azure Predictive Maintenance  ·  OVHcloud (région UE)</a:t>
+              <a:t>Bloc 2 — Architecture hybride Edge / Cloud  ·  Dataset Microsoft Azure Predictive Maintenance  ·  Cloud souverain européen</a:t>
             </a:r>
           </a:p>
         </p:txBody>
@@ -4261,7 +4261,7 @@
                 </a:solidFill>
                 <a:latin typeface="Segoe UI"/>
               </a:rPr>
-              <a:t>OVHCLOUD — RÉGION UE</a:t>
+              <a:t>CLOUD SOUVERAIN EUROPÉEN</a:t>
             </a:r>
           </a:p>
         </p:txBody>
@@ -4525,7 +4525,7 @@
         <p:spPr>
           <a:xfrm>
             <a:off x="4114800" y="1618488"/>
-            <a:ext cx="4251960" cy="219456"/>
+            <a:ext cx="3977640" cy="219456"/>
           </a:xfrm>
           <a:prstGeom prst="rect">
             <a:avLst/>
@@ -4546,7 +4546,7 @@
                 </a:solidFill>
                 <a:latin typeface="Segoe UI"/>
               </a:rPr>
-              <a:t>Broker d'ingestion — Kafka auto-hébergé (VM dédiée)</a:t>
+              <a:t>Broker d'ingestion — Kafka (auto-hébergé)</a:t>
             </a:r>
           </a:p>
         </p:txBody>
@@ -4586,9 +4586,62 @@
           </a:p>
         </p:txBody>
       </p:sp>
+      <p:sp>
+        <p:nvSpPr>
+          <p:cNvPr id="36" name="Oval 35"/>
+          <p:cNvSpPr/>
+          <p:nvPr/>
+        </p:nvSpPr>
+        <p:spPr>
+          <a:xfrm>
+            <a:off x="8229600" y="1609344"/>
+            <a:ext cx="237744" cy="237744"/>
+          </a:xfrm>
+          <a:prstGeom prst="ellipse">
+            <a:avLst/>
+          </a:prstGeom>
+          <a:solidFill>
+            <a:srgbClr val="F5C344"/>
+          </a:solidFill>
+          <a:ln>
+            <a:noFill/>
+          </a:ln>
+          <a:effectLst/>
+        </p:spPr>
+        <p:style>
+          <a:lnRef idx="1">
+            <a:schemeClr val="accent1"/>
+          </a:lnRef>
+          <a:fillRef idx="3">
+            <a:schemeClr val="accent1"/>
+          </a:fillRef>
+          <a:effectRef idx="2">
+            <a:schemeClr val="accent1"/>
+          </a:effectRef>
+          <a:fontRef idx="minor">
+            <a:schemeClr val="lt1"/>
+          </a:fontRef>
+        </p:style>
+        <p:txBody>
+          <a:bodyPr rtlCol="0" anchor="ctr" lIns="0" rIns="0" tIns="0" bIns="0"/>
+          <a:lstStyle/>
+          <a:p>
+            <a:pPr algn="ctr"/>
+            <a:r>
+              <a:rPr sz="800" b="1" i="0">
+                <a:solidFill>
+                  <a:srgbClr val="0B2947"/>
+                </a:solidFill>
+                <a:latin typeface="Segoe UI"/>
+              </a:rPr>
+              <a:t>①</a:t>
+            </a:r>
+          </a:p>
+        </p:txBody>
+      </p:sp>
       <p:cxnSp>
         <p:nvCxnSpPr>
-          <p:cNvPr id="36" name="Connector 35"/>
+          <p:cNvPr id="37" name="Connector 36"/>
           <p:cNvCxnSpPr/>
           <p:nvPr/>
         </p:nvCxnSpPr>
@@ -4624,7 +4677,7 @@
       </p:cxnSp>
       <p:cxnSp>
         <p:nvCxnSpPr>
-          <p:cNvPr id="37" name="Connector 36"/>
+          <p:cNvPr id="38" name="Connector 37"/>
           <p:cNvCxnSpPr/>
           <p:nvPr/>
         </p:nvCxnSpPr>
@@ -4660,7 +4713,7 @@
       </p:cxnSp>
       <p:sp>
         <p:nvSpPr>
-          <p:cNvPr id="38" name="TextBox 37"/>
+          <p:cNvPr id="39" name="TextBox 38"/>
           <p:cNvSpPr txBox="1"/>
           <p:nvPr/>
         </p:nvSpPr>
@@ -4695,7 +4748,7 @@
       </p:sp>
       <p:sp>
         <p:nvSpPr>
-          <p:cNvPr id="39" name="TextBox 38"/>
+          <p:cNvPr id="40" name="TextBox 39"/>
           <p:cNvSpPr txBox="1"/>
           <p:nvPr/>
         </p:nvSpPr>
@@ -4730,7 +4783,7 @@
       </p:sp>
       <p:sp>
         <p:nvSpPr>
-          <p:cNvPr id="40" name="TextBox 39"/>
+          <p:cNvPr id="41" name="TextBox 40"/>
           <p:cNvSpPr txBox="1"/>
           <p:nvPr/>
         </p:nvSpPr>
@@ -4765,7 +4818,7 @@
       </p:sp>
       <p:sp>
         <p:nvSpPr>
-          <p:cNvPr id="41" name="Rounded Rectangle 40"/>
+          <p:cNvPr id="42" name="Rounded Rectangle 41"/>
           <p:cNvSpPr/>
           <p:nvPr/>
         </p:nvSpPr>
@@ -4813,7 +4866,7 @@
       </p:sp>
       <p:cxnSp>
         <p:nvCxnSpPr>
-          <p:cNvPr id="42" name="Connector 41"/>
+          <p:cNvPr id="43" name="Connector 42"/>
           <p:cNvCxnSpPr/>
           <p:nvPr/>
         </p:nvCxnSpPr>
@@ -4849,7 +4902,7 @@
       </p:cxnSp>
       <p:sp>
         <p:nvSpPr>
-          <p:cNvPr id="43" name="Cloud 42"/>
+          <p:cNvPr id="44" name="Cloud 43"/>
           <p:cNvSpPr/>
           <p:nvPr/>
         </p:nvSpPr>
@@ -4893,7 +4946,7 @@
       </p:sp>
       <p:sp>
         <p:nvSpPr>
-          <p:cNvPr id="44" name="TextBox 43"/>
+          <p:cNvPr id="45" name="TextBox 44"/>
           <p:cNvSpPr txBox="1"/>
           <p:nvPr/>
         </p:nvSpPr>
@@ -4928,7 +4981,7 @@
       </p:sp>
       <p:sp>
         <p:nvSpPr>
-          <p:cNvPr id="45" name="TextBox 44"/>
+          <p:cNvPr id="46" name="TextBox 45"/>
           <p:cNvSpPr txBox="1"/>
           <p:nvPr/>
         </p:nvSpPr>
@@ -4963,7 +5016,7 @@
       </p:sp>
       <p:sp>
         <p:nvSpPr>
-          <p:cNvPr id="46" name="TextBox 45"/>
+          <p:cNvPr id="47" name="TextBox 46"/>
           <p:cNvSpPr txBox="1"/>
           <p:nvPr/>
         </p:nvSpPr>
@@ -4998,7 +5051,7 @@
       </p:sp>
       <p:cxnSp>
         <p:nvCxnSpPr>
-          <p:cNvPr id="47" name="Connector 46"/>
+          <p:cNvPr id="48" name="Connector 47"/>
           <p:cNvCxnSpPr/>
           <p:nvPr/>
         </p:nvCxnSpPr>
@@ -5034,7 +5087,7 @@
       </p:cxnSp>
       <p:cxnSp>
         <p:nvCxnSpPr>
-          <p:cNvPr id="48" name="Connector 47"/>
+          <p:cNvPr id="49" name="Connector 48"/>
           <p:cNvCxnSpPr/>
           <p:nvPr/>
         </p:nvCxnSpPr>
@@ -5070,7 +5123,7 @@
       </p:cxnSp>
       <p:sp>
         <p:nvSpPr>
-          <p:cNvPr id="49" name="Rounded Rectangle 48"/>
+          <p:cNvPr id="50" name="Rounded Rectangle 49"/>
           <p:cNvSpPr/>
           <p:nvPr/>
         </p:nvSpPr>
@@ -5118,7 +5171,7 @@
       </p:sp>
       <p:sp>
         <p:nvSpPr>
-          <p:cNvPr id="50" name="Can 49"/>
+          <p:cNvPr id="51" name="Can 50"/>
           <p:cNvSpPr/>
           <p:nvPr/>
         </p:nvSpPr>
@@ -5162,7 +5215,7 @@
       </p:sp>
       <p:sp>
         <p:nvSpPr>
-          <p:cNvPr id="51" name="TextBox 50"/>
+          <p:cNvPr id="52" name="TextBox 51"/>
           <p:cNvSpPr txBox="1"/>
           <p:nvPr/>
         </p:nvSpPr>
@@ -5197,7 +5250,7 @@
       </p:sp>
       <p:sp>
         <p:nvSpPr>
-          <p:cNvPr id="52" name="TextBox 51"/>
+          <p:cNvPr id="53" name="TextBox 52"/>
           <p:cNvSpPr txBox="1"/>
           <p:nvPr/>
         </p:nvSpPr>
@@ -5232,7 +5285,7 @@
       </p:sp>
       <p:sp>
         <p:nvSpPr>
-          <p:cNvPr id="53" name="Rounded Rectangle 52"/>
+          <p:cNvPr id="54" name="Rounded Rectangle 53"/>
           <p:cNvSpPr/>
           <p:nvPr/>
         </p:nvSpPr>
@@ -5287,7 +5340,7 @@
       </p:sp>
       <p:sp>
         <p:nvSpPr>
-          <p:cNvPr id="54" name="Rounded Rectangle 53"/>
+          <p:cNvPr id="55" name="Rounded Rectangle 54"/>
           <p:cNvSpPr/>
           <p:nvPr/>
         </p:nvSpPr>
@@ -5342,7 +5395,7 @@
       </p:sp>
       <p:sp>
         <p:nvSpPr>
-          <p:cNvPr id="55" name="Rounded Rectangle 54"/>
+          <p:cNvPr id="56" name="Rounded Rectangle 55"/>
           <p:cNvSpPr/>
           <p:nvPr/>
         </p:nvSpPr>
@@ -5390,7 +5443,7 @@
       </p:sp>
       <p:sp>
         <p:nvSpPr>
-          <p:cNvPr id="56" name="Can 55"/>
+          <p:cNvPr id="57" name="Can 56"/>
           <p:cNvSpPr/>
           <p:nvPr/>
         </p:nvSpPr>
@@ -5434,7 +5487,7 @@
       </p:sp>
       <p:sp>
         <p:nvSpPr>
-          <p:cNvPr id="57" name="TextBox 56"/>
+          <p:cNvPr id="58" name="TextBox 57"/>
           <p:cNvSpPr txBox="1"/>
           <p:nvPr/>
         </p:nvSpPr>
@@ -5462,14 +5515,14 @@
                 </a:solidFill>
                 <a:latin typeface="Segoe UI"/>
               </a:rPr>
-              <a:t>ClickHouse (VM)</a:t>
-            </a:r>
-          </a:p>
-        </p:txBody>
-      </p:sp>
-      <p:sp>
-        <p:nvSpPr>
-          <p:cNvPr id="58" name="TextBox 57"/>
+              <a:t>ClickHouse (auto-hébergé)</a:t>
+            </a:r>
+          </a:p>
+        </p:txBody>
+      </p:sp>
+      <p:sp>
+        <p:nvSpPr>
+          <p:cNvPr id="59" name="TextBox 58"/>
           <p:cNvSpPr txBox="1"/>
           <p:nvPr/>
         </p:nvSpPr>
@@ -5504,7 +5557,7 @@
       </p:sp>
       <p:sp>
         <p:nvSpPr>
-          <p:cNvPr id="59" name="Rounded Rectangle 58"/>
+          <p:cNvPr id="60" name="Rounded Rectangle 59"/>
           <p:cNvSpPr/>
           <p:nvPr/>
         </p:nvSpPr>
@@ -5559,7 +5612,7 @@
       </p:sp>
       <p:sp>
         <p:nvSpPr>
-          <p:cNvPr id="60" name="Rounded Rectangle 59"/>
+          <p:cNvPr id="61" name="Rounded Rectangle 60"/>
           <p:cNvSpPr/>
           <p:nvPr/>
         </p:nvSpPr>
@@ -5614,7 +5667,148 @@
       </p:sp>
       <p:sp>
         <p:nvSpPr>
-          <p:cNvPr id="61" name="Rounded Rectangle 60"/>
+          <p:cNvPr id="62" name="Oval 61"/>
+          <p:cNvSpPr/>
+          <p:nvPr/>
+        </p:nvSpPr>
+        <p:spPr>
+          <a:xfrm>
+            <a:off x="8284464" y="3172968"/>
+            <a:ext cx="237744" cy="237744"/>
+          </a:xfrm>
+          <a:prstGeom prst="ellipse">
+            <a:avLst/>
+          </a:prstGeom>
+          <a:solidFill>
+            <a:srgbClr val="F5C344"/>
+          </a:solidFill>
+          <a:ln>
+            <a:noFill/>
+          </a:ln>
+          <a:effectLst/>
+        </p:spPr>
+        <p:style>
+          <a:lnRef idx="1">
+            <a:schemeClr val="accent1"/>
+          </a:lnRef>
+          <a:fillRef idx="3">
+            <a:schemeClr val="accent1"/>
+          </a:fillRef>
+          <a:effectRef idx="2">
+            <a:schemeClr val="accent1"/>
+          </a:effectRef>
+          <a:fontRef idx="minor">
+            <a:schemeClr val="lt1"/>
+          </a:fontRef>
+        </p:style>
+        <p:txBody>
+          <a:bodyPr rtlCol="0" anchor="ctr" lIns="0" rIns="0" tIns="0" bIns="0"/>
+          <a:lstStyle/>
+          <a:p>
+            <a:pPr algn="ctr"/>
+            <a:r>
+              <a:rPr sz="800" b="1" i="0">
+                <a:solidFill>
+                  <a:srgbClr val="0B2947"/>
+                </a:solidFill>
+                <a:latin typeface="Segoe UI"/>
+              </a:rPr>
+              <a:t>①</a:t>
+            </a:r>
+          </a:p>
+        </p:txBody>
+      </p:sp>
+      <p:sp>
+        <p:nvSpPr>
+          <p:cNvPr id="63" name="Oval 62"/>
+          <p:cNvSpPr/>
+          <p:nvPr/>
+        </p:nvSpPr>
+        <p:spPr>
+          <a:xfrm>
+            <a:off x="3630168" y="4572000"/>
+            <a:ext cx="201168" cy="201168"/>
+          </a:xfrm>
+          <a:prstGeom prst="ellipse">
+            <a:avLst/>
+          </a:prstGeom>
+          <a:solidFill>
+            <a:srgbClr val="F5C344"/>
+          </a:solidFill>
+          <a:ln>
+            <a:noFill/>
+          </a:ln>
+          <a:effectLst/>
+        </p:spPr>
+        <p:style>
+          <a:lnRef idx="1">
+            <a:schemeClr val="accent1"/>
+          </a:lnRef>
+          <a:fillRef idx="3">
+            <a:schemeClr val="accent1"/>
+          </a:fillRef>
+          <a:effectRef idx="2">
+            <a:schemeClr val="accent1"/>
+          </a:effectRef>
+          <a:fontRef idx="minor">
+            <a:schemeClr val="lt1"/>
+          </a:fontRef>
+        </p:style>
+        <p:txBody>
+          <a:bodyPr rtlCol="0" anchor="ctr" lIns="0" rIns="0" tIns="0" bIns="0"/>
+          <a:lstStyle/>
+          <a:p>
+            <a:pPr algn="ctr"/>
+            <a:r>
+              <a:rPr sz="800" b="1" i="0">
+                <a:solidFill>
+                  <a:srgbClr val="0B2947"/>
+                </a:solidFill>
+                <a:latin typeface="Segoe UI"/>
+              </a:rPr>
+              <a:t>①</a:t>
+            </a:r>
+          </a:p>
+        </p:txBody>
+      </p:sp>
+      <p:sp>
+        <p:nvSpPr>
+          <p:cNvPr id="64" name="TextBox 63"/>
+          <p:cNvSpPr txBox="1"/>
+          <p:nvPr/>
+        </p:nvSpPr>
+        <p:spPr>
+          <a:xfrm>
+            <a:off x="3922776" y="4572000"/>
+            <a:ext cx="4626864" cy="310896"/>
+          </a:xfrm>
+          <a:prstGeom prst="rect">
+            <a:avLst/>
+          </a:prstGeom>
+          <a:noFill/>
+        </p:spPr>
+        <p:txBody>
+          <a:bodyPr wrap="square" lIns="0" rIns="0" tIns="0" bIns="0" anchor="ctr">
+            <a:spAutoFit/>
+          </a:bodyPr>
+          <a:lstStyle/>
+          <a:p>
+            <a:pPr algn="l"/>
+            <a:r>
+              <a:rPr sz="760" b="0" i="1">
+                <a:solidFill>
+                  <a:srgbClr val="55606E"/>
+                </a:solidFill>
+                <a:latin typeface="Segoe UI"/>
+              </a:rPr>
+              <a:t>même instance Compute (auto-hébergée) : Kafka + ClickHouse + Grafana + API prédictive + interface de supervision (Bloc 4)</a:t>
+            </a:r>
+          </a:p>
+        </p:txBody>
+      </p:sp>
+      <p:sp>
+        <p:nvSpPr>
+          <p:cNvPr id="65" name="Rounded Rectangle 64"/>
           <p:cNvSpPr/>
           <p:nvPr/>
         </p:nvSpPr>
@@ -5662,7 +5856,7 @@
       </p:sp>
       <p:sp>
         <p:nvSpPr>
-          <p:cNvPr id="62" name="TextBox 61"/>
+          <p:cNvPr id="66" name="TextBox 65"/>
           <p:cNvSpPr txBox="1"/>
           <p:nvPr/>
         </p:nvSpPr>
@@ -5697,7 +5891,7 @@
       </p:sp>
       <p:sp>
         <p:nvSpPr>
-          <p:cNvPr id="63" name="TextBox 62"/>
+          <p:cNvPr id="67" name="TextBox 66"/>
           <p:cNvSpPr txBox="1"/>
           <p:nvPr/>
         </p:nvSpPr>
@@ -5732,7 +5926,7 @@
       </p:sp>
       <p:sp>
         <p:nvSpPr>
-          <p:cNvPr id="64" name="Rounded Rectangle 63"/>
+          <p:cNvPr id="68" name="Rounded Rectangle 67"/>
           <p:cNvSpPr/>
           <p:nvPr/>
         </p:nvSpPr>
@@ -5780,7 +5974,7 @@
       </p:sp>
       <p:sp>
         <p:nvSpPr>
-          <p:cNvPr id="65" name="Lightning Bolt 64"/>
+          <p:cNvPr id="69" name="Lightning Bolt 68"/>
           <p:cNvSpPr/>
           <p:nvPr/>
         </p:nvSpPr>
@@ -5824,7 +6018,7 @@
       </p:sp>
       <p:sp>
         <p:nvSpPr>
-          <p:cNvPr id="66" name="TextBox 65"/>
+          <p:cNvPr id="70" name="TextBox 69"/>
           <p:cNvSpPr txBox="1"/>
           <p:nvPr/>
         </p:nvSpPr>
@@ -5859,7 +6053,7 @@
       </p:sp>
       <p:sp>
         <p:nvSpPr>
-          <p:cNvPr id="67" name="TextBox 66"/>
+          <p:cNvPr id="71" name="TextBox 70"/>
           <p:cNvSpPr txBox="1"/>
           <p:nvPr/>
         </p:nvSpPr>
@@ -5887,14 +6081,67 @@
                 </a:solidFill>
                 <a:latin typeface="Segoe UI"/>
               </a:rPr>
-              <a:t>Entraînement / inférence maintenance prédictive</a:t>
-            </a:r>
-          </a:p>
-        </p:txBody>
-      </p:sp>
-      <p:sp>
-        <p:nvSpPr>
-          <p:cNvPr id="68" name="TextBox 67"/>
+              <a:t>API + interface de supervision (Bloc 4)</a:t>
+            </a:r>
+          </a:p>
+        </p:txBody>
+      </p:sp>
+      <p:sp>
+        <p:nvSpPr>
+          <p:cNvPr id="72" name="Oval 71"/>
+          <p:cNvSpPr/>
+          <p:nvPr/>
+        </p:nvSpPr>
+        <p:spPr>
+          <a:xfrm>
+            <a:off x="11603736" y="1783080"/>
+            <a:ext cx="237744" cy="237744"/>
+          </a:xfrm>
+          <a:prstGeom prst="ellipse">
+            <a:avLst/>
+          </a:prstGeom>
+          <a:solidFill>
+            <a:srgbClr val="F5C344"/>
+          </a:solidFill>
+          <a:ln>
+            <a:noFill/>
+          </a:ln>
+          <a:effectLst/>
+        </p:spPr>
+        <p:style>
+          <a:lnRef idx="1">
+            <a:schemeClr val="accent1"/>
+          </a:lnRef>
+          <a:fillRef idx="3">
+            <a:schemeClr val="accent1"/>
+          </a:fillRef>
+          <a:effectRef idx="2">
+            <a:schemeClr val="accent1"/>
+          </a:effectRef>
+          <a:fontRef idx="minor">
+            <a:schemeClr val="lt1"/>
+          </a:fontRef>
+        </p:style>
+        <p:txBody>
+          <a:bodyPr rtlCol="0" anchor="ctr" lIns="0" rIns="0" tIns="0" bIns="0"/>
+          <a:lstStyle/>
+          <a:p>
+            <a:pPr algn="ctr"/>
+            <a:r>
+              <a:rPr sz="800" b="1" i="0">
+                <a:solidFill>
+                  <a:srgbClr val="0B2947"/>
+                </a:solidFill>
+                <a:latin typeface="Segoe UI"/>
+              </a:rPr>
+              <a:t>①</a:t>
+            </a:r>
+          </a:p>
+        </p:txBody>
+      </p:sp>
+      <p:sp>
+        <p:nvSpPr>
+          <p:cNvPr id="73" name="TextBox 72"/>
           <p:cNvSpPr txBox="1"/>
           <p:nvPr/>
         </p:nvSpPr>
@@ -5929,7 +6176,7 @@
       </p:sp>
       <p:sp>
         <p:nvSpPr>
-          <p:cNvPr id="69" name="Rounded Rectangle 68"/>
+          <p:cNvPr id="74" name="Rounded Rectangle 73"/>
           <p:cNvSpPr/>
           <p:nvPr/>
         </p:nvSpPr>
@@ -5948,7 +6195,7 @@
           </a:solidFill>
           <a:ln w="13970">
             <a:solidFill>
-              <a:srgbClr val="2E7D5B"/>
+              <a:srgbClr val="9AA5B1"/>
             </a:solidFill>
           </a:ln>
           <a:effectLst/>
@@ -5977,7 +6224,7 @@
       </p:sp>
       <p:sp>
         <p:nvSpPr>
-          <p:cNvPr id="70" name="Rounded Rectangle 69"/>
+          <p:cNvPr id="75" name="Rounded Rectangle 74"/>
           <p:cNvSpPr/>
           <p:nvPr/>
         </p:nvSpPr>
@@ -5992,7 +6239,7 @@
           <a:noFill/>
           <a:ln w="30480">
             <a:solidFill>
-              <a:srgbClr val="2E7D5B"/>
+              <a:srgbClr val="55606E"/>
             </a:solidFill>
           </a:ln>
           <a:effectLst/>
@@ -6021,7 +6268,7 @@
       </p:sp>
       <p:cxnSp>
         <p:nvCxnSpPr>
-          <p:cNvPr id="71" name="Connector 70"/>
+          <p:cNvPr id="76" name="Connector 75"/>
           <p:cNvCxnSpPr/>
           <p:nvPr/>
         </p:nvCxnSpPr>
@@ -6035,7 +6282,7 @@
           </a:prstGeom>
           <a:ln w="25400">
             <a:solidFill>
-              <a:srgbClr val="2E7D5B"/>
+              <a:srgbClr val="55606E"/>
             </a:solidFill>
           </a:ln>
         </p:spPr>
@@ -6056,7 +6303,7 @@
       </p:cxnSp>
       <p:cxnSp>
         <p:nvCxnSpPr>
-          <p:cNvPr id="72" name="Connector 71"/>
+          <p:cNvPr id="77" name="Connector 76"/>
           <p:cNvCxnSpPr/>
           <p:nvPr/>
         </p:nvCxnSpPr>
@@ -6070,7 +6317,7 @@
           </a:prstGeom>
           <a:ln w="25400">
             <a:solidFill>
-              <a:srgbClr val="2E7D5B"/>
+              <a:srgbClr val="55606E"/>
             </a:solidFill>
           </a:ln>
         </p:spPr>
@@ -6091,7 +6338,7 @@
       </p:cxnSp>
       <p:cxnSp>
         <p:nvCxnSpPr>
-          <p:cNvPr id="73" name="Connector 72"/>
+          <p:cNvPr id="78" name="Connector 77"/>
           <p:cNvCxnSpPr/>
           <p:nvPr/>
         </p:nvCxnSpPr>
@@ -6105,7 +6352,7 @@
           </a:prstGeom>
           <a:ln w="25400">
             <a:solidFill>
-              <a:srgbClr val="2E7D5B"/>
+              <a:srgbClr val="55606E"/>
             </a:solidFill>
           </a:ln>
         </p:spPr>
@@ -6126,7 +6373,7 @@
       </p:cxnSp>
       <p:cxnSp>
         <p:nvCxnSpPr>
-          <p:cNvPr id="74" name="Connector 73"/>
+          <p:cNvPr id="79" name="Connector 78"/>
           <p:cNvCxnSpPr/>
           <p:nvPr/>
         </p:nvCxnSpPr>
@@ -6140,7 +6387,7 @@
           </a:prstGeom>
           <a:ln w="25400">
             <a:solidFill>
-              <a:srgbClr val="2E7D5B"/>
+              <a:srgbClr val="55606E"/>
             </a:solidFill>
           </a:ln>
         </p:spPr>
@@ -6161,7 +6408,7 @@
       </p:cxnSp>
       <p:cxnSp>
         <p:nvCxnSpPr>
-          <p:cNvPr id="75" name="Connector 74"/>
+          <p:cNvPr id="80" name="Connector 79"/>
           <p:cNvCxnSpPr/>
           <p:nvPr/>
         </p:nvCxnSpPr>
@@ -6175,7 +6422,7 @@
           </a:prstGeom>
           <a:ln w="25400">
             <a:solidFill>
-              <a:srgbClr val="2E7D5B"/>
+              <a:srgbClr val="55606E"/>
             </a:solidFill>
           </a:ln>
         </p:spPr>
@@ -6196,7 +6443,7 @@
       </p:cxnSp>
       <p:cxnSp>
         <p:nvCxnSpPr>
-          <p:cNvPr id="76" name="Connector 75"/>
+          <p:cNvPr id="81" name="Connector 80"/>
           <p:cNvCxnSpPr/>
           <p:nvPr/>
         </p:nvCxnSpPr>
@@ -6210,7 +6457,7 @@
           </a:prstGeom>
           <a:ln w="25400">
             <a:solidFill>
-              <a:srgbClr val="2E7D5B"/>
+              <a:srgbClr val="55606E"/>
             </a:solidFill>
           </a:ln>
         </p:spPr>
@@ -6231,7 +6478,7 @@
       </p:cxnSp>
       <p:sp>
         <p:nvSpPr>
-          <p:cNvPr id="77" name="TextBox 76"/>
+          <p:cNvPr id="82" name="TextBox 81"/>
           <p:cNvSpPr txBox="1"/>
           <p:nvPr/>
         </p:nvSpPr>
@@ -6259,14 +6506,14 @@
                 </a:solidFill>
                 <a:latin typeface="Segoe UI"/>
               </a:rPr>
-              <a:t>Cloud GPU (OVHcloud)</a:t>
-            </a:r>
-          </a:p>
-        </p:txBody>
-      </p:sp>
-      <p:sp>
-        <p:nvSpPr>
-          <p:cNvPr id="78" name="TextBox 77"/>
+              <a:t>Pas de GPU cloud</a:t>
+            </a:r>
+          </a:p>
+        </p:txBody>
+      </p:sp>
+      <p:sp>
+        <p:nvSpPr>
+          <p:cNvPr id="83" name="TextBox 82"/>
           <p:cNvSpPr txBox="1"/>
           <p:nvPr/>
         </p:nvSpPr>
@@ -6294,14 +6541,14 @@
                 </a:solidFill>
                 <a:latin typeface="Segoe UI"/>
               </a:rPr>
-              <a:t>Cible production : cluster GPU managé (H100/L40S) pour l'entraînement. Démo réalisée en CPU local, le calcul GPU cloud étant coûteux.</a:t>
+              <a:t>Entraînement en CPU (forêts, pas de deep learning) : volumétrie et modèles ne justifient pas le coût d'un cluster GPU managé.</a:t>
             </a:r>
           </a:p>
         </p:txBody>
       </p:sp>
       <p:cxnSp>
         <p:nvCxnSpPr>
-          <p:cNvPr id="79" name="Connector 78"/>
+          <p:cNvPr id="84" name="Connector 83"/>
           <p:cNvCxnSpPr/>
           <p:nvPr/>
         </p:nvCxnSpPr>
@@ -6337,7 +6584,7 @@
       </p:cxnSp>
       <p:sp>
         <p:nvSpPr>
-          <p:cNvPr id="80" name="Rounded Rectangle 79"/>
+          <p:cNvPr id="85" name="Rounded Rectangle 84"/>
           <p:cNvSpPr/>
           <p:nvPr/>
         </p:nvSpPr>
@@ -6385,7 +6632,7 @@
       </p:sp>
       <p:sp>
         <p:nvSpPr>
-          <p:cNvPr id="81" name="TextBox 80"/>
+          <p:cNvPr id="86" name="TextBox 85"/>
           <p:cNvSpPr txBox="1"/>
           <p:nvPr/>
         </p:nvSpPr>
@@ -6420,7 +6667,7 @@
       </p:sp>
       <p:sp>
         <p:nvSpPr>
-          <p:cNvPr id="82" name="Rounded Rectangle 81"/>
+          <p:cNvPr id="87" name="Rounded Rectangle 86"/>
           <p:cNvSpPr/>
           <p:nvPr/>
         </p:nvSpPr>
@@ -6464,7 +6711,7 @@
       </p:sp>
       <p:sp>
         <p:nvSpPr>
-          <p:cNvPr id="83" name="Block Arc 82"/>
+          <p:cNvPr id="88" name="Block Arc 87"/>
           <p:cNvSpPr/>
           <p:nvPr/>
         </p:nvSpPr>
@@ -6508,7 +6755,7 @@
       </p:sp>
       <p:sp>
         <p:nvSpPr>
-          <p:cNvPr id="84" name="TextBox 83"/>
+          <p:cNvPr id="89" name="TextBox 88"/>
           <p:cNvSpPr txBox="1"/>
           <p:nvPr/>
         </p:nvSpPr>
@@ -6543,7 +6790,7 @@
       </p:sp>
       <p:sp>
         <p:nvSpPr>
-          <p:cNvPr id="85" name="TextBox 84"/>
+          <p:cNvPr id="90" name="TextBox 89"/>
           <p:cNvSpPr txBox="1"/>
           <p:nvPr/>
         </p:nvSpPr>
@@ -6578,7 +6825,7 @@
       </p:sp>
       <p:sp>
         <p:nvSpPr>
-          <p:cNvPr id="86" name="Oval 85"/>
+          <p:cNvPr id="91" name="Oval 90"/>
           <p:cNvSpPr/>
           <p:nvPr/>
         </p:nvSpPr>
@@ -6622,7 +6869,7 @@
       </p:sp>
       <p:sp>
         <p:nvSpPr>
-          <p:cNvPr id="87" name="Oval 86"/>
+          <p:cNvPr id="92" name="Oval 91"/>
           <p:cNvSpPr/>
           <p:nvPr/>
         </p:nvSpPr>
@@ -6666,7 +6913,7 @@
       </p:sp>
       <p:sp>
         <p:nvSpPr>
-          <p:cNvPr id="88" name="TextBox 87"/>
+          <p:cNvPr id="93" name="TextBox 92"/>
           <p:cNvSpPr txBox="1"/>
           <p:nvPr/>
         </p:nvSpPr>
@@ -6694,14 +6941,14 @@
                 </a:solidFill>
                 <a:latin typeface="Segoe UI"/>
               </a:rPr>
-              <a:t>vRack</a:t>
-            </a:r>
-          </a:p>
-        </p:txBody>
-      </p:sp>
-      <p:sp>
-        <p:nvSpPr>
-          <p:cNvPr id="89" name="TextBox 88"/>
+              <a:t>Réseau privé</a:t>
+            </a:r>
+          </a:p>
+        </p:txBody>
+      </p:sp>
+      <p:sp>
+        <p:nvSpPr>
+          <p:cNvPr id="94" name="TextBox 93"/>
           <p:cNvSpPr txBox="1"/>
           <p:nvPr/>
         </p:nvSpPr>
@@ -6729,14 +6976,14 @@
                 </a:solidFill>
                 <a:latin typeface="Segoe UI"/>
               </a:rPr>
-              <a:t>Réseau privé interne (Storage ↔ Bases)</a:t>
+              <a:t>Réseau interne isolé (Storage ↔ Bases)</a:t>
             </a:r>
           </a:p>
         </p:txBody>
       </p:sp>
       <p:cxnSp>
         <p:nvCxnSpPr>
-          <p:cNvPr id="90" name="Connector 89"/>
+          <p:cNvPr id="95" name="Connector 94"/>
           <p:cNvCxnSpPr/>
           <p:nvPr/>
         </p:nvCxnSpPr>
@@ -6771,7 +7018,7 @@
       </p:cxnSp>
       <p:sp>
         <p:nvSpPr>
-          <p:cNvPr id="91" name="Oval 90"/>
+          <p:cNvPr id="96" name="Oval 95"/>
           <p:cNvSpPr/>
           <p:nvPr/>
         </p:nvSpPr>
@@ -6815,7 +7062,7 @@
       </p:sp>
       <p:cxnSp>
         <p:nvCxnSpPr>
-          <p:cNvPr id="92" name="Connector 91"/>
+          <p:cNvPr id="97" name="Connector 96"/>
           <p:cNvCxnSpPr/>
           <p:nvPr/>
         </p:nvCxnSpPr>
@@ -6850,7 +7097,7 @@
       </p:cxnSp>
       <p:cxnSp>
         <p:nvCxnSpPr>
-          <p:cNvPr id="93" name="Connector 92"/>
+          <p:cNvPr id="98" name="Connector 97"/>
           <p:cNvCxnSpPr/>
           <p:nvPr/>
         </p:nvCxnSpPr>
@@ -6885,7 +7132,7 @@
       </p:cxnSp>
       <p:cxnSp>
         <p:nvCxnSpPr>
-          <p:cNvPr id="94" name="Connector 93"/>
+          <p:cNvPr id="99" name="Connector 98"/>
           <p:cNvCxnSpPr/>
           <p:nvPr/>
         </p:nvCxnSpPr>
@@ -6920,7 +7167,7 @@
       </p:cxnSp>
       <p:sp>
         <p:nvSpPr>
-          <p:cNvPr id="95" name="TextBox 94"/>
+          <p:cNvPr id="100" name="TextBox 99"/>
           <p:cNvSpPr txBox="1"/>
           <p:nvPr/>
         </p:nvSpPr>
@@ -6955,7 +7202,7 @@
       </p:sp>
       <p:sp>
         <p:nvSpPr>
-          <p:cNvPr id="96" name="TextBox 95"/>
+          <p:cNvPr id="101" name="TextBox 100"/>
           <p:cNvSpPr txBox="1"/>
           <p:nvPr/>
         </p:nvSpPr>
@@ -6990,7 +7237,7 @@
       </p:sp>
       <p:cxnSp>
         <p:nvCxnSpPr>
-          <p:cNvPr id="97" name="Connector 96"/>
+          <p:cNvPr id="102" name="Connector 101"/>
           <p:cNvCxnSpPr/>
           <p:nvPr/>
         </p:nvCxnSpPr>
@@ -7025,7 +7272,7 @@
       </p:cxnSp>
       <p:sp>
         <p:nvSpPr>
-          <p:cNvPr id="98" name="Oval 97"/>
+          <p:cNvPr id="103" name="Oval 102"/>
           <p:cNvSpPr/>
           <p:nvPr/>
         </p:nvSpPr>
@@ -7069,7 +7316,7 @@
       </p:sp>
       <p:sp>
         <p:nvSpPr>
-          <p:cNvPr id="99" name="Oval 98"/>
+          <p:cNvPr id="104" name="Oval 103"/>
           <p:cNvSpPr/>
           <p:nvPr/>
         </p:nvSpPr>
@@ -7113,7 +7360,7 @@
       </p:sp>
       <p:sp>
         <p:nvSpPr>
-          <p:cNvPr id="100" name="TextBox 99"/>
+          <p:cNvPr id="105" name="TextBox 104"/>
           <p:cNvSpPr txBox="1"/>
           <p:nvPr/>
         </p:nvSpPr>
@@ -7148,7 +7395,7 @@
       </p:sp>
       <p:sp>
         <p:nvSpPr>
-          <p:cNvPr id="101" name="TextBox 100"/>
+          <p:cNvPr id="106" name="TextBox 105"/>
           <p:cNvSpPr txBox="1"/>
           <p:nvPr/>
         </p:nvSpPr>
@@ -7183,7 +7430,7 @@
       </p:sp>
       <p:cxnSp>
         <p:nvCxnSpPr>
-          <p:cNvPr id="102" name="Connector 101"/>
+          <p:cNvPr id="107" name="Connector 106"/>
           <p:cNvCxnSpPr/>
           <p:nvPr/>
         </p:nvCxnSpPr>
@@ -7218,7 +7465,7 @@
       </p:cxnSp>
       <p:sp>
         <p:nvSpPr>
-          <p:cNvPr id="103" name="Rounded Rectangle 102"/>
+          <p:cNvPr id="108" name="Rounded Rectangle 107"/>
           <p:cNvSpPr/>
           <p:nvPr/>
         </p:nvSpPr>
@@ -7262,7 +7509,7 @@
       </p:sp>
       <p:sp>
         <p:nvSpPr>
-          <p:cNvPr id="104" name="Rectangle 103"/>
+          <p:cNvPr id="109" name="Rectangle 108"/>
           <p:cNvSpPr/>
           <p:nvPr/>
         </p:nvSpPr>
@@ -7306,7 +7553,7 @@
       </p:sp>
       <p:sp>
         <p:nvSpPr>
-          <p:cNvPr id="105" name="Rectangle 104"/>
+          <p:cNvPr id="110" name="Rectangle 109"/>
           <p:cNvSpPr/>
           <p:nvPr/>
         </p:nvSpPr>
@@ -7350,7 +7597,7 @@
       </p:sp>
       <p:sp>
         <p:nvSpPr>
-          <p:cNvPr id="106" name="Rectangle 105"/>
+          <p:cNvPr id="111" name="Rectangle 110"/>
           <p:cNvSpPr/>
           <p:nvPr/>
         </p:nvSpPr>
@@ -7394,7 +7641,7 @@
       </p:sp>
       <p:sp>
         <p:nvSpPr>
-          <p:cNvPr id="107" name="TextBox 106"/>
+          <p:cNvPr id="112" name="TextBox 111"/>
           <p:cNvSpPr txBox="1"/>
           <p:nvPr/>
         </p:nvSpPr>
@@ -7429,7 +7676,7 @@
       </p:sp>
       <p:sp>
         <p:nvSpPr>
-          <p:cNvPr id="108" name="TextBox 107"/>
+          <p:cNvPr id="113" name="TextBox 112"/>
           <p:cNvSpPr txBox="1"/>
           <p:nvPr/>
         </p:nvSpPr>
@@ -7464,7 +7711,7 @@
       </p:sp>
       <p:cxnSp>
         <p:nvCxnSpPr>
-          <p:cNvPr id="109" name="Connector 108"/>
+          <p:cNvPr id="114" name="Connector 113"/>
           <p:cNvCxnSpPr/>
           <p:nvPr/>
         </p:nvCxnSpPr>
@@ -7499,7 +7746,7 @@
       </p:cxnSp>
       <p:sp>
         <p:nvSpPr>
-          <p:cNvPr id="110" name="TextBox 109"/>
+          <p:cNvPr id="115" name="TextBox 114"/>
           <p:cNvSpPr txBox="1"/>
           <p:nvPr/>
         </p:nvSpPr>
@@ -7534,7 +7781,7 @@
       </p:sp>
       <p:sp>
         <p:nvSpPr>
-          <p:cNvPr id="111" name="Rounded Rectangle 110"/>
+          <p:cNvPr id="116" name="Rounded Rectangle 115"/>
           <p:cNvSpPr/>
           <p:nvPr/>
         </p:nvSpPr>

--- a/diagram/architecture-edge-cloud.pptx
+++ b/diagram/architecture-edge-cloud.pptx
@@ -3207,7 +3207,7 @@
                 </a:solidFill>
                 <a:latin typeface="Segoe UI"/>
               </a:rPr>
-              <a:t>Bloc 2 — Architecture hybride Edge / Cloud  ·  Dataset Microsoft Azure Predictive Maintenance  ·  Cloud souverain européen</a:t>
+              <a:t>Bloc 2 — Architecture hybride Edge / Cloud  ·  Dataset Microsoft Azure Predictive Maintenance  ·  Cloud souverain européen (Scaleway)</a:t>
             </a:r>
           </a:p>
         </p:txBody>
@@ -4296,7 +4296,7 @@
                 </a:solidFill>
                 <a:latin typeface="Segoe UI"/>
               </a:rPr>
-              <a:t>Cloud souverain, conforme RGPD</a:t>
+              <a:t>Scaleway (France) — cloud souverain, conforme RGPD</a:t>
             </a:r>
           </a:p>
         </p:txBody>
